--- a/packaging-publishing/Slides/2_versioncontrol.pptx
+++ b/packaging-publishing/Slides/2_versioncontrol.pptx
@@ -5,7 +5,7 @@
     <p:sldMasterId id="2147483648" r:id="rId1"/>
   </p:sldMasterIdLst>
   <p:notesMasterIdLst>
-    <p:notesMasterId r:id="rId14"/>
+    <p:notesMasterId r:id="rId15"/>
   </p:notesMasterIdLst>
   <p:sldIdLst>
     <p:sldId id="319" r:id="rId2"/>
@@ -20,6 +20,7 @@
     <p:sldId id="328" r:id="rId11"/>
     <p:sldId id="329" r:id="rId12"/>
     <p:sldId id="330" r:id="rId13"/>
+    <p:sldId id="331" r:id="rId14"/>
   </p:sldIdLst>
   <p:sldSz cx="12192000" cy="6858000"/>
   <p:notesSz cx="6858000" cy="9144000"/>
@@ -118,7 +119,306 @@
       </a:defRPr>
     </a:lvl9pPr>
   </p:defaultTextStyle>
+  <p:extLst>
+    <p:ext uri="{EFAFB233-063F-42B5-8137-9DF3F51BA10A}">
+      <p15:sldGuideLst xmlns:p15="http://schemas.microsoft.com/office/powerpoint/2012/main"/>
+    </p:ext>
+  </p:extLst>
 </p:presentation>
+</file>
+
+<file path=ppt/revisionInfo.xml><?xml version="1.0" encoding="utf-8"?>
+<p1510:revInfo xmlns:a="http://schemas.openxmlformats.org/drawingml/2006/main" xmlns:r="http://schemas.openxmlformats.org/officeDocument/2006/relationships" xmlns:p1510="http://schemas.microsoft.com/office/powerpoint/2015/10/main">
+  <p1510:revLst>
+    <p1510:client id="{BD76AD5A-4C6E-9E44-9BC6-C515B2BA6C83}" v="18" dt="2026-03-06T10:10:04.003"/>
+  </p1510:revLst>
+</p1510:revInfo>
+</file>
+
+<file path=ppt/changesInfos/changesInfo1.xml><?xml version="1.0" encoding="utf-8"?>
+<pc:chgInfo xmlns:a="http://schemas.openxmlformats.org/drawingml/2006/main" xmlns:r="http://schemas.openxmlformats.org/officeDocument/2006/relationships" xmlns:ac="http://schemas.microsoft.com/office/drawing/2013/main/command" xmlns:pc="http://schemas.microsoft.com/office/powerpoint/2013/main/command">
+  <pc:docChgLst>
+    <pc:chgData name="Finley Griffin" userId="22b0b6c4-ce40-4dd6-a0c2-f0f65dd91442" providerId="ADAL" clId="{E340F9FE-63CF-5DC1-BB85-0501F5A6B451}"/>
+    <pc:docChg chg="undo custSel addSld modSld">
+      <pc:chgData name="Finley Griffin" userId="22b0b6c4-ce40-4dd6-a0c2-f0f65dd91442" providerId="ADAL" clId="{E340F9FE-63CF-5DC1-BB85-0501F5A6B451}" dt="2026-03-06T10:11:05.088" v="668" actId="20577"/>
+      <pc:docMkLst>
+        <pc:docMk/>
+      </pc:docMkLst>
+      <pc:sldChg chg="modNotesTx">
+        <pc:chgData name="Finley Griffin" userId="22b0b6c4-ce40-4dd6-a0c2-f0f65dd91442" providerId="ADAL" clId="{E340F9FE-63CF-5DC1-BB85-0501F5A6B451}" dt="2026-03-05T13:52:27.574" v="0" actId="20577"/>
+        <pc:sldMkLst>
+          <pc:docMk/>
+          <pc:sldMk cId="4226939350" sldId="322"/>
+        </pc:sldMkLst>
+      </pc:sldChg>
+      <pc:sldChg chg="modNotesTx">
+        <pc:chgData name="Finley Griffin" userId="22b0b6c4-ce40-4dd6-a0c2-f0f65dd91442" providerId="ADAL" clId="{E340F9FE-63CF-5DC1-BB85-0501F5A6B451}" dt="2026-03-05T13:54:40.774" v="1" actId="20577"/>
+        <pc:sldMkLst>
+          <pc:docMk/>
+          <pc:sldMk cId="1501153965" sldId="324"/>
+        </pc:sldMkLst>
+      </pc:sldChg>
+      <pc:sldChg chg="modNotesTx">
+        <pc:chgData name="Finley Griffin" userId="22b0b6c4-ce40-4dd6-a0c2-f0f65dd91442" providerId="ADAL" clId="{E340F9FE-63CF-5DC1-BB85-0501F5A6B451}" dt="2026-03-05T13:55:00.918" v="2" actId="20577"/>
+        <pc:sldMkLst>
+          <pc:docMk/>
+          <pc:sldMk cId="3960589576" sldId="326"/>
+        </pc:sldMkLst>
+      </pc:sldChg>
+      <pc:sldChg chg="modNotesTx">
+        <pc:chgData name="Finley Griffin" userId="22b0b6c4-ce40-4dd6-a0c2-f0f65dd91442" providerId="ADAL" clId="{E340F9FE-63CF-5DC1-BB85-0501F5A6B451}" dt="2026-03-05T13:55:26.627" v="3" actId="20577"/>
+        <pc:sldMkLst>
+          <pc:docMk/>
+          <pc:sldMk cId="1894901620" sldId="327"/>
+        </pc:sldMkLst>
+      </pc:sldChg>
+      <pc:sldChg chg="modNotesTx">
+        <pc:chgData name="Finley Griffin" userId="22b0b6c4-ce40-4dd6-a0c2-f0f65dd91442" providerId="ADAL" clId="{E340F9FE-63CF-5DC1-BB85-0501F5A6B451}" dt="2026-03-05T13:55:36.014" v="4" actId="20577"/>
+        <pc:sldMkLst>
+          <pc:docMk/>
+          <pc:sldMk cId="1305406005" sldId="328"/>
+        </pc:sldMkLst>
+      </pc:sldChg>
+      <pc:sldChg chg="modNotesTx">
+        <pc:chgData name="Finley Griffin" userId="22b0b6c4-ce40-4dd6-a0c2-f0f65dd91442" providerId="ADAL" clId="{E340F9FE-63CF-5DC1-BB85-0501F5A6B451}" dt="2026-03-05T13:56:11.479" v="5" actId="20577"/>
+        <pc:sldMkLst>
+          <pc:docMk/>
+          <pc:sldMk cId="3624456403" sldId="329"/>
+        </pc:sldMkLst>
+      </pc:sldChg>
+      <pc:sldChg chg="addSp delSp modSp mod modNotesTx">
+        <pc:chgData name="Finley Griffin" userId="22b0b6c4-ce40-4dd6-a0c2-f0f65dd91442" providerId="ADAL" clId="{E340F9FE-63CF-5DC1-BB85-0501F5A6B451}" dt="2026-03-05T14:14:04.408" v="495" actId="20577"/>
+        <pc:sldMkLst>
+          <pc:docMk/>
+          <pc:sldMk cId="3643261532" sldId="330"/>
+        </pc:sldMkLst>
+        <pc:spChg chg="del">
+          <ac:chgData name="Finley Griffin" userId="22b0b6c4-ce40-4dd6-a0c2-f0f65dd91442" providerId="ADAL" clId="{E340F9FE-63CF-5DC1-BB85-0501F5A6B451}" dt="2026-03-05T14:01:43.028" v="6" actId="478"/>
+          <ac:spMkLst>
+            <pc:docMk/>
+            <pc:sldMk cId="3643261532" sldId="330"/>
+            <ac:spMk id="4" creationId="{696BCD64-7D07-7275-9161-A544A4FFA03A}"/>
+          </ac:spMkLst>
+        </pc:spChg>
+        <pc:spChg chg="mod">
+          <ac:chgData name="Finley Griffin" userId="22b0b6c4-ce40-4dd6-a0c2-f0f65dd91442" providerId="ADAL" clId="{E340F9FE-63CF-5DC1-BB85-0501F5A6B451}" dt="2026-03-05T14:12:54.833" v="439" actId="255"/>
+          <ac:spMkLst>
+            <pc:docMk/>
+            <pc:sldMk cId="3643261532" sldId="330"/>
+            <ac:spMk id="6" creationId="{667A7450-5E4F-62F0-3B59-3CF8D4B2EAA4}"/>
+          </ac:spMkLst>
+        </pc:spChg>
+        <pc:spChg chg="add del mod">
+          <ac:chgData name="Finley Griffin" userId="22b0b6c4-ce40-4dd6-a0c2-f0f65dd91442" providerId="ADAL" clId="{E340F9FE-63CF-5DC1-BB85-0501F5A6B451}" dt="2026-03-05T14:01:46.447" v="8" actId="478"/>
+          <ac:spMkLst>
+            <pc:docMk/>
+            <pc:sldMk cId="3643261532" sldId="330"/>
+            <ac:spMk id="7" creationId="{9A664D8B-7FAE-4791-338E-6639DB080D7B}"/>
+          </ac:spMkLst>
+        </pc:spChg>
+        <pc:spChg chg="add del">
+          <ac:chgData name="Finley Griffin" userId="22b0b6c4-ce40-4dd6-a0c2-f0f65dd91442" providerId="ADAL" clId="{E340F9FE-63CF-5DC1-BB85-0501F5A6B451}" dt="2026-03-05T14:02:51.059" v="22" actId="478"/>
+          <ac:spMkLst>
+            <pc:docMk/>
+            <pc:sldMk cId="3643261532" sldId="330"/>
+            <ac:spMk id="15" creationId="{0DCF1C6A-F31D-33B3-03D3-BF58286D22E3}"/>
+          </ac:spMkLst>
+        </pc:spChg>
+        <pc:spChg chg="add mod">
+          <ac:chgData name="Finley Griffin" userId="22b0b6c4-ce40-4dd6-a0c2-f0f65dd91442" providerId="ADAL" clId="{E340F9FE-63CF-5DC1-BB85-0501F5A6B451}" dt="2026-03-05T14:03:41.665" v="99" actId="1076"/>
+          <ac:spMkLst>
+            <pc:docMk/>
+            <pc:sldMk cId="3643261532" sldId="330"/>
+            <ac:spMk id="16" creationId="{17A7A6F4-47D8-056F-F007-1FC8850133EB}"/>
+          </ac:spMkLst>
+        </pc:spChg>
+        <pc:spChg chg="add del mod">
+          <ac:chgData name="Finley Griffin" userId="22b0b6c4-ce40-4dd6-a0c2-f0f65dd91442" providerId="ADAL" clId="{E340F9FE-63CF-5DC1-BB85-0501F5A6B451}" dt="2026-03-05T14:03:12.597" v="46" actId="478"/>
+          <ac:spMkLst>
+            <pc:docMk/>
+            <pc:sldMk cId="3643261532" sldId="330"/>
+            <ac:spMk id="17" creationId="{EDB1FB56-EA35-3CFB-9546-56AEDC184309}"/>
+          </ac:spMkLst>
+        </pc:spChg>
+        <pc:spChg chg="add mod">
+          <ac:chgData name="Finley Griffin" userId="22b0b6c4-ce40-4dd6-a0c2-f0f65dd91442" providerId="ADAL" clId="{E340F9FE-63CF-5DC1-BB85-0501F5A6B451}" dt="2026-03-05T14:03:57.198" v="101" actId="1076"/>
+          <ac:spMkLst>
+            <pc:docMk/>
+            <pc:sldMk cId="3643261532" sldId="330"/>
+            <ac:spMk id="18" creationId="{93562274-C1E5-BED9-1536-5571E3098007}"/>
+          </ac:spMkLst>
+        </pc:spChg>
+        <pc:spChg chg="add mod">
+          <ac:chgData name="Finley Griffin" userId="22b0b6c4-ce40-4dd6-a0c2-f0f65dd91442" providerId="ADAL" clId="{E340F9FE-63CF-5DC1-BB85-0501F5A6B451}" dt="2026-03-05T14:03:44.430" v="100" actId="1076"/>
+          <ac:spMkLst>
+            <pc:docMk/>
+            <pc:sldMk cId="3643261532" sldId="330"/>
+            <ac:spMk id="19" creationId="{AE189D10-63C7-52F1-954C-FD499394D9CF}"/>
+          </ac:spMkLst>
+        </pc:spChg>
+        <pc:spChg chg="add mod">
+          <ac:chgData name="Finley Griffin" userId="22b0b6c4-ce40-4dd6-a0c2-f0f65dd91442" providerId="ADAL" clId="{E340F9FE-63CF-5DC1-BB85-0501F5A6B451}" dt="2026-03-05T14:04:59.716" v="124" actId="20577"/>
+          <ac:spMkLst>
+            <pc:docMk/>
+            <pc:sldMk cId="3643261532" sldId="330"/>
+            <ac:spMk id="20" creationId="{9C9F0CDD-7CB2-DCAA-68D2-E89908CFEE43}"/>
+          </ac:spMkLst>
+        </pc:spChg>
+        <pc:spChg chg="add mod">
+          <ac:chgData name="Finley Griffin" userId="22b0b6c4-ce40-4dd6-a0c2-f0f65dd91442" providerId="ADAL" clId="{E340F9FE-63CF-5DC1-BB85-0501F5A6B451}" dt="2026-03-05T14:12:48.147" v="438" actId="14100"/>
+          <ac:spMkLst>
+            <pc:docMk/>
+            <pc:sldMk cId="3643261532" sldId="330"/>
+            <ac:spMk id="21" creationId="{31604E53-7CE3-303D-67E5-9D180577F926}"/>
+          </ac:spMkLst>
+        </pc:spChg>
+        <pc:spChg chg="add del mod">
+          <ac:chgData name="Finley Griffin" userId="22b0b6c4-ce40-4dd6-a0c2-f0f65dd91442" providerId="ADAL" clId="{E340F9FE-63CF-5DC1-BB85-0501F5A6B451}" dt="2026-03-05T14:12:17.572" v="403" actId="478"/>
+          <ac:spMkLst>
+            <pc:docMk/>
+            <pc:sldMk cId="3643261532" sldId="330"/>
+            <ac:spMk id="22" creationId="{0FDF1F23-3E94-9922-82A8-1A9876344B4A}"/>
+          </ac:spMkLst>
+        </pc:spChg>
+        <pc:spChg chg="add del mod">
+          <ac:chgData name="Finley Griffin" userId="22b0b6c4-ce40-4dd6-a0c2-f0f65dd91442" providerId="ADAL" clId="{E340F9FE-63CF-5DC1-BB85-0501F5A6B451}" dt="2026-03-05T14:07:06.505" v="195" actId="478"/>
+          <ac:spMkLst>
+            <pc:docMk/>
+            <pc:sldMk cId="3643261532" sldId="330"/>
+            <ac:spMk id="23" creationId="{5B8A20D2-5EA2-C569-A2FD-5E9D2480DB0E}"/>
+          </ac:spMkLst>
+        </pc:spChg>
+        <pc:spChg chg="add mod">
+          <ac:chgData name="Finley Griffin" userId="22b0b6c4-ce40-4dd6-a0c2-f0f65dd91442" providerId="ADAL" clId="{E340F9FE-63CF-5DC1-BB85-0501F5A6B451}" dt="2026-03-05T14:12:54.833" v="439" actId="255"/>
+          <ac:spMkLst>
+            <pc:docMk/>
+            <pc:sldMk cId="3643261532" sldId="330"/>
+            <ac:spMk id="24" creationId="{70A58676-812F-A1DB-9D04-30BE2AA75DF2}"/>
+          </ac:spMkLst>
+        </pc:spChg>
+        <pc:spChg chg="add mod">
+          <ac:chgData name="Finley Griffin" userId="22b0b6c4-ce40-4dd6-a0c2-f0f65dd91442" providerId="ADAL" clId="{E340F9FE-63CF-5DC1-BB85-0501F5A6B451}" dt="2026-03-05T14:10:27.233" v="242" actId="14100"/>
+          <ac:spMkLst>
+            <pc:docMk/>
+            <pc:sldMk cId="3643261532" sldId="330"/>
+            <ac:spMk id="25" creationId="{526EDD86-93FD-7FE2-BEED-5DD85A46F9CA}"/>
+          </ac:spMkLst>
+        </pc:spChg>
+        <pc:spChg chg="add mod">
+          <ac:chgData name="Finley Griffin" userId="22b0b6c4-ce40-4dd6-a0c2-f0f65dd91442" providerId="ADAL" clId="{E340F9FE-63CF-5DC1-BB85-0501F5A6B451}" dt="2026-03-05T14:10:45.448" v="260" actId="14100"/>
+          <ac:spMkLst>
+            <pc:docMk/>
+            <pc:sldMk cId="3643261532" sldId="330"/>
+            <ac:spMk id="26" creationId="{1030D4B1-D0D0-8F3C-3B97-CFC461F298FE}"/>
+          </ac:spMkLst>
+        </pc:spChg>
+        <pc:spChg chg="add mod">
+          <ac:chgData name="Finley Griffin" userId="22b0b6c4-ce40-4dd6-a0c2-f0f65dd91442" providerId="ADAL" clId="{E340F9FE-63CF-5DC1-BB85-0501F5A6B451}" dt="2026-03-05T14:13:00.069" v="441" actId="1076"/>
+          <ac:spMkLst>
+            <pc:docMk/>
+            <pc:sldMk cId="3643261532" sldId="330"/>
+            <ac:spMk id="27" creationId="{45FDF737-C1DB-DDCB-D4D0-BB5300EB945E}"/>
+          </ac:spMkLst>
+        </pc:spChg>
+        <pc:spChg chg="add mod">
+          <ac:chgData name="Finley Griffin" userId="22b0b6c4-ce40-4dd6-a0c2-f0f65dd91442" providerId="ADAL" clId="{E340F9FE-63CF-5DC1-BB85-0501F5A6B451}" dt="2026-03-05T14:12:57.835" v="440" actId="1076"/>
+          <ac:spMkLst>
+            <pc:docMk/>
+            <pc:sldMk cId="3643261532" sldId="330"/>
+            <ac:spMk id="28" creationId="{3DCD04A5-9A48-35E4-9E40-4BEF40A59EF3}"/>
+          </ac:spMkLst>
+        </pc:spChg>
+        <pc:spChg chg="add mod">
+          <ac:chgData name="Finley Griffin" userId="22b0b6c4-ce40-4dd6-a0c2-f0f65dd91442" providerId="ADAL" clId="{E340F9FE-63CF-5DC1-BB85-0501F5A6B451}" dt="2026-03-05T14:14:04.408" v="495" actId="20577"/>
+          <ac:spMkLst>
+            <pc:docMk/>
+            <pc:sldMk cId="3643261532" sldId="330"/>
+            <ac:spMk id="29" creationId="{714908ED-8B6B-B7CE-618C-8932E325FCB1}"/>
+          </ac:spMkLst>
+        </pc:spChg>
+        <pc:cxnChg chg="add mod">
+          <ac:chgData name="Finley Griffin" userId="22b0b6c4-ce40-4dd6-a0c2-f0f65dd91442" providerId="ADAL" clId="{E340F9FE-63CF-5DC1-BB85-0501F5A6B451}" dt="2026-03-05T14:02:41.417" v="20" actId="208"/>
+          <ac:cxnSpMkLst>
+            <pc:docMk/>
+            <pc:sldMk cId="3643261532" sldId="330"/>
+            <ac:cxnSpMk id="9" creationId="{38E91936-D3AB-686A-AF62-E00A839A113C}"/>
+          </ac:cxnSpMkLst>
+        </pc:cxnChg>
+        <pc:cxnChg chg="add mod">
+          <ac:chgData name="Finley Griffin" userId="22b0b6c4-ce40-4dd6-a0c2-f0f65dd91442" providerId="ADAL" clId="{E340F9FE-63CF-5DC1-BB85-0501F5A6B451}" dt="2026-03-05T14:02:41.417" v="20" actId="208"/>
+          <ac:cxnSpMkLst>
+            <pc:docMk/>
+            <pc:sldMk cId="3643261532" sldId="330"/>
+            <ac:cxnSpMk id="10" creationId="{791E84B6-0C22-5A53-1C7D-CBB107C76BEB}"/>
+          </ac:cxnSpMkLst>
+        </pc:cxnChg>
+      </pc:sldChg>
+      <pc:sldChg chg="addSp delSp modSp new mod">
+        <pc:chgData name="Finley Griffin" userId="22b0b6c4-ce40-4dd6-a0c2-f0f65dd91442" providerId="ADAL" clId="{E340F9FE-63CF-5DC1-BB85-0501F5A6B451}" dt="2026-03-06T10:11:05.088" v="668" actId="20577"/>
+        <pc:sldMkLst>
+          <pc:docMk/>
+          <pc:sldMk cId="1495705753" sldId="331"/>
+        </pc:sldMkLst>
+        <pc:spChg chg="mod">
+          <ac:chgData name="Finley Griffin" userId="22b0b6c4-ce40-4dd6-a0c2-f0f65dd91442" providerId="ADAL" clId="{E340F9FE-63CF-5DC1-BB85-0501F5A6B451}" dt="2026-03-06T10:02:59.369" v="543" actId="20577"/>
+          <ac:spMkLst>
+            <pc:docMk/>
+            <pc:sldMk cId="1495705753" sldId="331"/>
+            <ac:spMk id="2" creationId="{23AC0913-7678-7088-0C8A-69CC9CD87457}"/>
+          </ac:spMkLst>
+        </pc:spChg>
+        <pc:spChg chg="del">
+          <ac:chgData name="Finley Griffin" userId="22b0b6c4-ce40-4dd6-a0c2-f0f65dd91442" providerId="ADAL" clId="{E340F9FE-63CF-5DC1-BB85-0501F5A6B451}" dt="2026-03-06T10:03:04.277" v="544" actId="478"/>
+          <ac:spMkLst>
+            <pc:docMk/>
+            <pc:sldMk cId="1495705753" sldId="331"/>
+            <ac:spMk id="3" creationId="{697E1430-1FFA-D3DD-BB86-25244BA47DD4}"/>
+          </ac:spMkLst>
+        </pc:spChg>
+        <pc:spChg chg="add del mod">
+          <ac:chgData name="Finley Griffin" userId="22b0b6c4-ce40-4dd6-a0c2-f0f65dd91442" providerId="ADAL" clId="{E340F9FE-63CF-5DC1-BB85-0501F5A6B451}" dt="2026-03-06T10:11:05.088" v="668" actId="20577"/>
+          <ac:spMkLst>
+            <pc:docMk/>
+            <pc:sldMk cId="1495705753" sldId="331"/>
+            <ac:spMk id="4" creationId="{27D5D536-D61C-6796-C14C-A06789A4FDC3}"/>
+          </ac:spMkLst>
+        </pc:spChg>
+        <pc:spChg chg="add del mod">
+          <ac:chgData name="Finley Griffin" userId="22b0b6c4-ce40-4dd6-a0c2-f0f65dd91442" providerId="ADAL" clId="{E340F9FE-63CF-5DC1-BB85-0501F5A6B451}" dt="2026-03-06T10:05:59.553" v="621" actId="478"/>
+          <ac:spMkLst>
+            <pc:docMk/>
+            <pc:sldMk cId="1495705753" sldId="331"/>
+            <ac:spMk id="6" creationId="{0E0EF31F-3F5B-A453-438A-DED7837B8913}"/>
+          </ac:spMkLst>
+        </pc:spChg>
+        <pc:spChg chg="add mod">
+          <ac:chgData name="Finley Griffin" userId="22b0b6c4-ce40-4dd6-a0c2-f0f65dd91442" providerId="ADAL" clId="{E340F9FE-63CF-5DC1-BB85-0501F5A6B451}" dt="2026-03-06T10:10:39.597" v="630" actId="1582"/>
+          <ac:spMkLst>
+            <pc:docMk/>
+            <pc:sldMk cId="1495705753" sldId="331"/>
+            <ac:spMk id="8" creationId="{B3FCB599-DA0D-78B2-24A6-83A6F73A120A}"/>
+          </ac:spMkLst>
+        </pc:spChg>
+        <pc:picChg chg="add del mod">
+          <ac:chgData name="Finley Griffin" userId="22b0b6c4-ce40-4dd6-a0c2-f0f65dd91442" providerId="ADAL" clId="{E340F9FE-63CF-5DC1-BB85-0501F5A6B451}" dt="2026-03-06T10:05:59.553" v="621" actId="478"/>
+          <ac:picMkLst>
+            <pc:docMk/>
+            <pc:sldMk cId="1495705753" sldId="331"/>
+            <ac:picMk id="5" creationId="{5FCEF8CE-840E-E713-F6C3-A74F16634F2F}"/>
+          </ac:picMkLst>
+        </pc:picChg>
+        <pc:picChg chg="add mod">
+          <ac:chgData name="Finley Griffin" userId="22b0b6c4-ce40-4dd6-a0c2-f0f65dd91442" providerId="ADAL" clId="{E340F9FE-63CF-5DC1-BB85-0501F5A6B451}" dt="2026-03-06T10:10:10.098" v="624" actId="1076"/>
+          <ac:picMkLst>
+            <pc:docMk/>
+            <pc:sldMk cId="1495705753" sldId="331"/>
+            <ac:picMk id="7" creationId="{21D1564C-3157-E018-CD51-0FA9F3CA99D7}"/>
+          </ac:picMkLst>
+        </pc:picChg>
+      </pc:sldChg>
+    </pc:docChg>
+  </pc:docChgLst>
+</pc:chgInfo>
 </file>
 
 <file path=ppt/notesMasters/notesMaster1.xml><?xml version="1.0" encoding="utf-8"?>
@@ -203,7 +503,7 @@
           <a:p>
             <a:fld id="{C021860F-0246-6943-9513-9B83B6C99F1D}" type="datetimeFigureOut">
               <a:rPr lang="en-US" smtClean="0"/>
-              <a:t>4/29/24</a:t>
+              <a:t>3/6/26</a:t>
             </a:fld>
             <a:endParaRPr lang="en-US"/>
           </a:p>
@@ -610,71 +910,7 @@
           <a:bodyPr/>
           <a:lstStyle/>
           <a:p>
-            <a:r>
-              <a:rPr lang="en-US" dirty="0"/>
-              <a:t>What kind of licenses are available to you:</a:t>
-            </a:r>
-          </a:p>
-          <a:p>
             <a:endParaRPr lang="en-US" dirty="0"/>
-          </a:p>
-          <a:p>
-            <a:r>
-              <a:rPr lang="en-US" dirty="0"/>
-              <a:t>If you are contributing or extending a piece of software where your work is highly dependent on or is almost the same as the original software, then it is generally best to use the same license as the original project. Many licenses actually require you to use the same license.</a:t>
-            </a:r>
-          </a:p>
-          <a:p>
-            <a:endParaRPr lang="en-US" dirty="0"/>
-          </a:p>
-          <a:p>
-            <a:r>
-              <a:rPr lang="en-US" dirty="0"/>
-              <a:t>Then there are essentially two types of licenses: commercially permissive and commercially non-permissive. The core difference is, can you use the code in order to produce closed source code. So for permissive licenses, people can take your code and use it for commercial closed source purposes. Some very common examples are the Apache and MIT licenses.</a:t>
-            </a:r>
-          </a:p>
-          <a:p>
-            <a:endParaRPr lang="en-US" dirty="0"/>
-          </a:p>
-          <a:p>
-            <a:r>
-              <a:rPr lang="en-US" dirty="0"/>
-              <a:t>The second are highly restrictive: if people use your code, they have to essentially make their own code also open source. The most common version of this type of license is the GNU GPLv3, which also comes in the </a:t>
-            </a:r>
-            <a:r>
-              <a:rPr lang="en-US" dirty="0" err="1"/>
-              <a:t>affero</a:t>
-            </a:r>
-            <a:r>
-              <a:rPr lang="en-US" dirty="0"/>
-              <a:t> form – which also means any SaaS applications being run on servers must also be open source.</a:t>
-            </a:r>
-          </a:p>
-          <a:p>
-            <a:endParaRPr lang="en-US" dirty="0"/>
-          </a:p>
-          <a:p>
-            <a:r>
-              <a:rPr lang="en-US" dirty="0"/>
-              <a:t>So why wouldn’t you just GPL everything? Everything open source right? Well the GPL license is very restrictive – imagine trying to develop machine learning applications in industry if </a:t>
-            </a:r>
-            <a:r>
-              <a:rPr lang="en-US" dirty="0" err="1"/>
-              <a:t>PyTorch</a:t>
-            </a:r>
-            <a:r>
-              <a:rPr lang="en-US" dirty="0"/>
-              <a:t> was under a GPL license…?</a:t>
-            </a:r>
-          </a:p>
-          <a:p>
-            <a:endParaRPr lang="en-US" dirty="0"/>
-          </a:p>
-          <a:p>
-            <a:r>
-              <a:rPr lang="en-US" dirty="0"/>
-              <a:t>You can also negotiate with individual users a separate license to allow commercial use.</a:t>
-            </a:r>
           </a:p>
         </p:txBody>
       </p:sp>
@@ -758,54 +994,7 @@
           <a:bodyPr/>
           <a:lstStyle/>
           <a:p>
-            <a:r>
-              <a:rPr lang="en-US" dirty="0"/>
-              <a:t>Git is a way that we can keep track of these files. It comes in really handy if you want to work with very many people.</a:t>
-            </a:r>
-          </a:p>
-          <a:p>
             <a:endParaRPr lang="en-US" dirty="0"/>
-          </a:p>
-          <a:p>
-            <a:r>
-              <a:rPr lang="en-US" dirty="0"/>
-              <a:t>We will quickly go through an intro to git here, and then we’ll cover other things that we need as they come up.</a:t>
-            </a:r>
-          </a:p>
-          <a:p>
-            <a:endParaRPr lang="en-US" dirty="0"/>
-          </a:p>
-          <a:p>
-            <a:r>
-              <a:rPr lang="en-US" dirty="0"/>
-              <a:t>I’ve just included some general rules for git and </a:t>
-            </a:r>
-            <a:r>
-              <a:rPr lang="en-US" dirty="0" err="1"/>
-              <a:t>github</a:t>
-            </a:r>
-            <a:r>
-              <a:rPr lang="en-US" dirty="0"/>
-              <a:t>.</a:t>
-            </a:r>
-          </a:p>
-          <a:p>
-            <a:endParaRPr lang="en-US" dirty="0"/>
-          </a:p>
-          <a:p>
-            <a:r>
-              <a:rPr lang="en-US" dirty="0"/>
-              <a:t>So the main structure of git is the branch. When you make a change you add the change to your pile of changes. Then when you’re finished, you commit these changes.</a:t>
-            </a:r>
-          </a:p>
-          <a:p>
-            <a:endParaRPr lang="en-US" dirty="0"/>
-          </a:p>
-          <a:p>
-            <a:r>
-              <a:rPr lang="en-US" dirty="0"/>
-              <a:t>There are a few different approaches to using git. Main branch and dev branch is a decent way to go for open source software development.</a:t>
-            </a:r>
           </a:p>
         </p:txBody>
       </p:sp>
@@ -1043,118 +1232,7 @@
           <a:bodyPr/>
           <a:lstStyle/>
           <a:p>
-            <a:r>
-              <a:rPr lang="en-US" dirty="0"/>
-              <a:t>Why did GitHub emerge as the go-to VC repo?</a:t>
-            </a:r>
-          </a:p>
-          <a:p>
             <a:endParaRPr lang="en-US" dirty="0"/>
-          </a:p>
-          <a:p>
-            <a:pPr marL="171450" indent="-171450">
-              <a:buFontTx/>
-              <a:buChar char="-"/>
-            </a:pPr>
-            <a:r>
-              <a:rPr lang="en-US" dirty="0"/>
-              <a:t>Early emergence advantage: GitHub was one of the first and most prominent platforms to provide git-based online version control</a:t>
-            </a:r>
-          </a:p>
-          <a:p>
-            <a:pPr marL="171450" indent="-171450">
-              <a:buFontTx/>
-              <a:buChar char="-"/>
-            </a:pPr>
-            <a:r>
-              <a:rPr lang="en-US" dirty="0"/>
-              <a:t>User friendly: GitHub is very user friendly, and has a wide range of features for developers. Things like pull requests, issue tracking, and code review tools have become integral to modern software workflows</a:t>
-            </a:r>
-          </a:p>
-          <a:p>
-            <a:pPr marL="171450" indent="-171450">
-              <a:buFontTx/>
-              <a:buChar char="-"/>
-            </a:pPr>
-            <a:r>
-              <a:rPr lang="en-US" dirty="0"/>
-              <a:t>Lots of third party tool integrations that enhance the functionality and integrate with other development tools and services.</a:t>
-            </a:r>
-          </a:p>
-          <a:p>
-            <a:pPr marL="171450" indent="-171450">
-              <a:buFontTx/>
-              <a:buChar char="-"/>
-            </a:pPr>
-            <a:r>
-              <a:rPr lang="en-US" dirty="0"/>
-              <a:t>Many popular open source projects are on GitHub, and they have attracted a large community of developers</a:t>
-            </a:r>
-          </a:p>
-          <a:p>
-            <a:pPr marL="171450" indent="-171450">
-              <a:buFontTx/>
-              <a:buChar char="-"/>
-            </a:pPr>
-            <a:r>
-              <a:rPr lang="en-US" dirty="0"/>
-              <a:t>In 2018, Microsoft acquired GitHub, which further solidified its position, and provided additional resources, as well as integration with other Microsoft tools and services.</a:t>
-            </a:r>
-          </a:p>
-          <a:p>
-            <a:pPr marL="171450" indent="-171450">
-              <a:buFontTx/>
-              <a:buChar char="-"/>
-            </a:pPr>
-            <a:endParaRPr lang="en-US" dirty="0"/>
-          </a:p>
-          <a:p>
-            <a:pPr marL="171450" indent="-171450">
-              <a:buFontTx/>
-              <a:buChar char="-"/>
-            </a:pPr>
-            <a:r>
-              <a:rPr lang="en-US" dirty="0"/>
-              <a:t>A great feature is also </a:t>
-            </a:r>
-            <a:r>
-              <a:rPr lang="en-US" dirty="0" err="1"/>
-              <a:t>Codespaces</a:t>
-            </a:r>
-            <a:r>
-              <a:rPr lang="en-US" dirty="0"/>
-              <a:t>, which we will use today</a:t>
-            </a:r>
-          </a:p>
-          <a:p>
-            <a:pPr marL="171450" indent="-171450">
-              <a:buFontTx/>
-              <a:buChar char="-"/>
-            </a:pPr>
-            <a:endParaRPr lang="en-US" dirty="0"/>
-          </a:p>
-          <a:p>
-            <a:pPr marL="0" marR="0" lvl="0" indent="0" algn="l" defTabSz="914400" rtl="0" eaLnBrk="1" fontAlgn="auto" latinLnBrk="0" hangingPunct="1">
-              <a:lnSpc>
-                <a:spcPct val="100000"/>
-              </a:lnSpc>
-              <a:spcBef>
-                <a:spcPts val="0"/>
-              </a:spcBef>
-              <a:spcAft>
-                <a:spcPts val="0"/>
-              </a:spcAft>
-              <a:buClrTx/>
-              <a:buSzTx/>
-              <a:buFontTx/>
-              <a:buNone/>
-              <a:tabLst/>
-              <a:defRPr/>
-            </a:pPr>
-            <a:r>
-              <a:rPr lang="en-US" dirty="0"/>
-              <a:t>So all in all, GitHub is a great platform.</a:t>
-            </a:r>
           </a:p>
         </p:txBody>
       </p:sp>
@@ -1359,127 +1437,7 @@
           <a:bodyPr/>
           <a:lstStyle/>
           <a:p>
-            <a:r>
-              <a:rPr lang="en-US" dirty="0"/>
-              <a:t>VS Code is a good all round development environment.</a:t>
-            </a:r>
-          </a:p>
-          <a:p>
             <a:endParaRPr lang="en-US" dirty="0"/>
-          </a:p>
-          <a:p>
-            <a:r>
-              <a:rPr lang="en-US" dirty="0"/>
-              <a:t>Some advantages:</a:t>
-            </a:r>
-          </a:p>
-          <a:p>
-            <a:pPr marL="171450" indent="-171450">
-              <a:buFontTx/>
-              <a:buChar char="-"/>
-            </a:pPr>
-            <a:r>
-              <a:rPr lang="en-US" dirty="0"/>
-              <a:t>VS Code is quite lightweight, which means it opens quickly, and executes code quickly</a:t>
-            </a:r>
-          </a:p>
-          <a:p>
-            <a:pPr marL="171450" indent="-171450">
-              <a:buFontTx/>
-              <a:buChar char="-"/>
-            </a:pPr>
-            <a:r>
-              <a:rPr lang="en-US" dirty="0"/>
-              <a:t>You don’t have to use it for Python, you can use it for basically any language you want, or even multiple languages</a:t>
-            </a:r>
-          </a:p>
-          <a:p>
-            <a:pPr marL="171450" indent="-171450">
-              <a:buFontTx/>
-              <a:buChar char="-"/>
-            </a:pPr>
-            <a:r>
-              <a:rPr lang="en-US" dirty="0"/>
-              <a:t>It comes with all of the features you expect it to: a debugger, a terminal, testing</a:t>
-            </a:r>
-          </a:p>
-          <a:p>
-            <a:pPr marL="171450" indent="-171450">
-              <a:buFontTx/>
-              <a:buChar char="-"/>
-            </a:pPr>
-            <a:r>
-              <a:rPr lang="en-US" dirty="0"/>
-              <a:t>Probably the most powerful part of VS Code are the extensions:</a:t>
-            </a:r>
-          </a:p>
-          <a:p>
-            <a:pPr marL="628650" lvl="1" indent="-171450">
-              <a:buFontTx/>
-              <a:buChar char="-"/>
-            </a:pPr>
-            <a:r>
-              <a:rPr lang="en-US" dirty="0" err="1"/>
-              <a:t>Jupyter</a:t>
-            </a:r>
-            <a:r>
-              <a:rPr lang="en-US" dirty="0"/>
-              <a:t> – </a:t>
-            </a:r>
-            <a:r>
-              <a:rPr lang="en-US" dirty="0" err="1"/>
-              <a:t>Jupyter</a:t>
-            </a:r>
-            <a:r>
-              <a:rPr lang="en-US" dirty="0"/>
-              <a:t> is really good for exploratory analysis and quick prototyping, so if you want to use it, you can.</a:t>
-            </a:r>
-          </a:p>
-          <a:p>
-            <a:pPr marL="628650" lvl="1" indent="-171450">
-              <a:buFontTx/>
-              <a:buChar char="-"/>
-            </a:pPr>
-            <a:r>
-              <a:rPr lang="en-US" dirty="0"/>
-              <a:t>Version control and </a:t>
-            </a:r>
-            <a:r>
-              <a:rPr lang="en-US" dirty="0" err="1"/>
-              <a:t>github</a:t>
-            </a:r>
-            <a:r>
-              <a:rPr lang="en-US" dirty="0"/>
-              <a:t> integration. You don’t need to use the terminal for git, you can do most of the simple stuff from the UI</a:t>
-            </a:r>
-          </a:p>
-          <a:p>
-            <a:pPr marL="628650" lvl="1" indent="-171450">
-              <a:buFontTx/>
-              <a:buChar char="-"/>
-            </a:pPr>
-            <a:r>
-              <a:rPr lang="en-US" dirty="0"/>
-              <a:t>Remote development – you can setup </a:t>
-            </a:r>
-            <a:r>
-              <a:rPr lang="en-US" dirty="0" err="1"/>
-              <a:t>vscode</a:t>
-            </a:r>
-            <a:r>
-              <a:rPr lang="en-US" dirty="0"/>
-              <a:t> as a remote development environment. So if you’re doing any work on the HPC, you can set things up so that you can just do all of your work from code, as if you’re working locally, which is a fantastic feature</a:t>
-            </a:r>
-          </a:p>
-          <a:p>
-            <a:pPr marL="628650" lvl="1" indent="-171450">
-              <a:buFontTx/>
-              <a:buChar char="-"/>
-            </a:pPr>
-            <a:r>
-              <a:rPr lang="en-US" dirty="0"/>
-              <a:t>It has copilot, and copilot chat.</a:t>
-            </a:r>
           </a:p>
           <a:p>
             <a:pPr marL="628650" lvl="1" indent="-171450">
@@ -1578,211 +1536,6 @@
               <a:t>Does anybody here use Copilot?</a:t>
             </a:r>
           </a:p>
-          <a:p>
-            <a:endParaRPr lang="en-US" dirty="0"/>
-          </a:p>
-          <a:p>
-            <a:r>
-              <a:rPr lang="en-US" dirty="0"/>
-              <a:t>There are some advantages and disadvantages about using </a:t>
-            </a:r>
-            <a:r>
-              <a:rPr lang="en-US" dirty="0" err="1"/>
-              <a:t>Copliot</a:t>
-            </a:r>
-            <a:endParaRPr lang="en-US" dirty="0"/>
-          </a:p>
-          <a:p>
-            <a:pPr marL="171450" indent="-171450">
-              <a:buFontTx/>
-              <a:buChar char="-"/>
-            </a:pPr>
-            <a:r>
-              <a:rPr lang="en-US" dirty="0"/>
-              <a:t>Reduces time to write fairly easy bits of code.</a:t>
-            </a:r>
-          </a:p>
-          <a:p>
-            <a:pPr marL="628650" lvl="1" indent="-171450">
-              <a:buFontTx/>
-              <a:buChar char="-"/>
-            </a:pPr>
-            <a:r>
-              <a:rPr lang="en-US" dirty="0"/>
-              <a:t>An example might be trying to parse a certain file type. You might say, write me a function that will read a .txt file and break it down by lines.</a:t>
-            </a:r>
-          </a:p>
-          <a:p>
-            <a:pPr marL="628650" lvl="1" indent="-171450">
-              <a:buFontTx/>
-              <a:buChar char="-"/>
-            </a:pPr>
-            <a:r>
-              <a:rPr lang="en-US" dirty="0"/>
-              <a:t>Or some </a:t>
-            </a:r>
-            <a:r>
-              <a:rPr lang="en-US" dirty="0" err="1"/>
-              <a:t>numpy</a:t>
-            </a:r>
-            <a:r>
-              <a:rPr lang="en-US" dirty="0"/>
-              <a:t> or pandas functionality that you can’t quite remember like, give me the column with this heading and the column with this heading, multiply them together, reverse it, and then take the 10</a:t>
-            </a:r>
-            <a:r>
-              <a:rPr lang="en-US" baseline="30000" dirty="0"/>
-              <a:t>th</a:t>
-            </a:r>
-            <a:r>
-              <a:rPr lang="en-US" dirty="0"/>
-              <a:t> element of the result and put it into a dictionary. And </a:t>
-            </a:r>
-            <a:r>
-              <a:rPr lang="en-US" dirty="0" err="1"/>
-              <a:t>numpy</a:t>
-            </a:r>
-            <a:r>
-              <a:rPr lang="en-US" dirty="0"/>
-              <a:t> will have like a </a:t>
-            </a:r>
-            <a:r>
-              <a:rPr lang="en-US" dirty="0" err="1"/>
-              <a:t>oneliner</a:t>
-            </a:r>
-            <a:r>
-              <a:rPr lang="en-US" dirty="0"/>
-              <a:t> that will do it or something.</a:t>
-            </a:r>
-          </a:p>
-          <a:p>
-            <a:pPr marL="171450" lvl="0" indent="-171450">
-              <a:buFontTx/>
-              <a:buChar char="-"/>
-            </a:pPr>
-            <a:r>
-              <a:rPr lang="en-US" dirty="0"/>
-              <a:t>This means you spend less time on stack overflow and sifting through documentation</a:t>
-            </a:r>
-          </a:p>
-          <a:p>
-            <a:pPr marL="171450" lvl="0" indent="-171450">
-              <a:buFontTx/>
-              <a:buChar char="-"/>
-            </a:pPr>
-            <a:r>
-              <a:rPr lang="en-US" dirty="0"/>
-              <a:t>It can help you write basic test cases. And I do mean very basic.</a:t>
-            </a:r>
-          </a:p>
-          <a:p>
-            <a:pPr marL="171450" lvl="0" indent="-171450">
-              <a:buFontTx/>
-              <a:buChar char="-"/>
-            </a:pPr>
-            <a:r>
-              <a:rPr lang="en-US" dirty="0"/>
-              <a:t>It can help you find issues with code, or find the source of errors, or suboptimal code</a:t>
-            </a:r>
-          </a:p>
-          <a:p>
-            <a:pPr marL="171450" lvl="0" indent="-171450">
-              <a:buFontTx/>
-              <a:buChar char="-"/>
-            </a:pPr>
-            <a:r>
-              <a:rPr lang="en-US" dirty="0"/>
-              <a:t>It’s a great learning tool. I am what you might call a backend developer, so I know very little about building frontend </a:t>
-            </a:r>
-            <a:r>
-              <a:rPr lang="en-US" dirty="0" err="1"/>
-              <a:t>Uis</a:t>
-            </a:r>
-            <a:r>
-              <a:rPr lang="en-US" dirty="0"/>
-              <a:t> using things like JS/HTML/CSS. And there is a lot of information out there about these tools, which means copilot has probably had a lot of exposure to them in its training data.</a:t>
-            </a:r>
-          </a:p>
-          <a:p>
-            <a:endParaRPr lang="en-US" dirty="0"/>
-          </a:p>
-          <a:p>
-            <a:r>
-              <a:rPr lang="en-US" dirty="0"/>
-              <a:t>Disadvantages</a:t>
-            </a:r>
-          </a:p>
-          <a:p>
-            <a:pPr marL="171450" indent="-171450">
-              <a:buFontTx/>
-              <a:buChar char="-"/>
-            </a:pPr>
-            <a:r>
-              <a:rPr lang="en-US" dirty="0"/>
-              <a:t>It sometimes produces total nonsense. At it’s heart, copilot is a large language model, and LLMs are highly susceptible to hallucination</a:t>
-            </a:r>
-          </a:p>
-          <a:p>
-            <a:pPr marL="171450" indent="-171450">
-              <a:buFontTx/>
-              <a:buChar char="-"/>
-            </a:pPr>
-            <a:r>
-              <a:rPr lang="en-US" dirty="0"/>
-              <a:t>This is a </a:t>
-            </a:r>
-            <a:r>
-              <a:rPr lang="en-US" dirty="0" err="1"/>
-              <a:t>microsoft</a:t>
-            </a:r>
-            <a:r>
-              <a:rPr lang="en-US" dirty="0"/>
-              <a:t> product and it is closed source. You have no idea what’s going on under the hood and are therefore susceptible to their terms of use, and any updates they make.</a:t>
-            </a:r>
-          </a:p>
-          <a:p>
-            <a:pPr marL="171450" indent="-171450">
-              <a:buFontTx/>
-              <a:buChar char="-"/>
-            </a:pPr>
-            <a:r>
-              <a:rPr lang="en-US" dirty="0"/>
-              <a:t>You might waste time looking for faulty bits of code.</a:t>
-            </a:r>
-          </a:p>
-          <a:p>
-            <a:endParaRPr lang="en-US" dirty="0"/>
-          </a:p>
-          <a:p>
-            <a:r>
-              <a:rPr lang="en-US" dirty="0"/>
-              <a:t>There are many divisive opinions on using large language models for work. In my opinion, to turn away from it entirely is a mistake. It can be a real productivity booster if used correctly, but can lead to serious problems if abused.</a:t>
-            </a:r>
-            <a:br>
-              <a:rPr lang="en-US" dirty="0"/>
-            </a:br>
-            <a:r>
-              <a:rPr lang="en-US" dirty="0"/>
-              <a:t>Some other models to use are GPT4, and Claude Opus. Both are highly capable.</a:t>
-            </a:r>
-          </a:p>
-          <a:p>
-            <a:endParaRPr lang="en-US" dirty="0"/>
-          </a:p>
-          <a:p>
-            <a:r>
-              <a:rPr lang="en-US" dirty="0"/>
-              <a:t>Copilot is not a substitute for actually understanding your code. You need to verify that it’s correct!</a:t>
-            </a:r>
-          </a:p>
-          <a:p>
-            <a:endParaRPr lang="en-US" dirty="0"/>
-          </a:p>
-          <a:p>
-            <a:r>
-              <a:rPr lang="en-US" dirty="0"/>
-              <a:t>So, do I use it? Yes!</a:t>
-            </a:r>
-          </a:p>
         </p:txBody>
       </p:sp>
       <p:sp>
@@ -1865,82 +1618,7 @@
           <a:bodyPr/>
           <a:lstStyle/>
           <a:p>
-            <a:r>
-              <a:rPr lang="en-US" dirty="0"/>
-              <a:t>There are a number of files that are quite important to your project repository:</a:t>
-            </a:r>
-          </a:p>
-          <a:p>
             <a:endParaRPr lang="en-US" dirty="0"/>
-          </a:p>
-          <a:p>
-            <a:pPr marL="171450" indent="-171450">
-              <a:buFontTx/>
-              <a:buChar char="-"/>
-            </a:pPr>
-            <a:r>
-              <a:rPr lang="en-US" dirty="0"/>
-              <a:t>A </a:t>
-            </a:r>
-            <a:r>
-              <a:rPr lang="en-US" dirty="0" err="1"/>
-              <a:t>README.md</a:t>
-            </a:r>
-            <a:r>
-              <a:rPr lang="en-US" dirty="0"/>
-              <a:t> file. Includes some general information about your project. Written in a markdown language which is simple and quick to use, with a lot of functionality. There is also the ability to add html and </a:t>
-            </a:r>
-            <a:r>
-              <a:rPr lang="en-US" dirty="0" err="1"/>
-              <a:t>css</a:t>
-            </a:r>
-            <a:r>
-              <a:rPr lang="en-US" dirty="0"/>
-              <a:t> for more complicated pages.</a:t>
-            </a:r>
-          </a:p>
-          <a:p>
-            <a:pPr marL="171450" indent="-171450">
-              <a:buFontTx/>
-              <a:buChar char="-"/>
-            </a:pPr>
-            <a:endParaRPr lang="en-US" dirty="0"/>
-          </a:p>
-          <a:p>
-            <a:pPr marL="171450" indent="-171450">
-              <a:buFontTx/>
-              <a:buChar char="-"/>
-            </a:pPr>
-            <a:r>
-              <a:rPr lang="en-US" dirty="0"/>
-              <a:t>A .</a:t>
-            </a:r>
-            <a:r>
-              <a:rPr lang="en-US" dirty="0" err="1"/>
-              <a:t>gitignore</a:t>
-            </a:r>
-            <a:r>
-              <a:rPr lang="en-US" dirty="0"/>
-              <a:t> file. Everything that you want to hide from the public. There is usually a standard template that you can follow. Git will not track the changes made in the files or folders listed in the </a:t>
-            </a:r>
-            <a:r>
-              <a:rPr lang="en-US" dirty="0" err="1"/>
-              <a:t>gitignore</a:t>
-            </a:r>
-            <a:r>
-              <a:rPr lang="en-US" dirty="0"/>
-              <a:t> file and it will not sync them to your repo. You would include your local environment here, and things like large data files, or .env files that include private information like API keys.</a:t>
-            </a:r>
-          </a:p>
-          <a:p>
-            <a:pPr marL="171450" indent="-171450">
-              <a:buFontTx/>
-              <a:buChar char="-"/>
-            </a:pPr>
-            <a:r>
-              <a:rPr lang="en-US" dirty="0"/>
-              <a:t>A LICENSE file. This is a very important file</a:t>
-            </a:r>
           </a:p>
         </p:txBody>
       </p:sp>
@@ -2026,25 +1704,7 @@
           <a:p>
             <a:r>
               <a:rPr lang="en-US" dirty="0"/>
-              <a:t>If you want others to use your code, you have to include a license. If you don’t, then other people cannot legally take your code and modify it in any way.</a:t>
-            </a:r>
-          </a:p>
-          <a:p>
-            <a:endParaRPr lang="en-US" dirty="0"/>
-          </a:p>
-          <a:p>
-            <a:r>
-              <a:rPr lang="en-US" dirty="0"/>
-              <a:t>Similarly, if you come across code that has no license, you can’t use it!</a:t>
-            </a:r>
-          </a:p>
-          <a:p>
-            <a:endParaRPr lang="en-US" dirty="0"/>
-          </a:p>
-          <a:p>
-            <a:r>
-              <a:rPr lang="en-US" dirty="0"/>
-              <a:t>This is probably not what you intend when you decide not to include a license. So you should include one!</a:t>
+              <a:t>]</a:t>
             </a:r>
           </a:p>
         </p:txBody>
@@ -2234,7 +1894,7 @@
           <a:p>
             <a:fld id="{E0E47B38-4403-474D-B901-AA01AFFF0327}" type="datetimeFigureOut">
               <a:rPr lang="en-US" smtClean="0"/>
-              <a:t>4/29/24</a:t>
+              <a:t>3/6/26</a:t>
             </a:fld>
             <a:endParaRPr lang="en-US"/>
           </a:p>
@@ -2434,7 +2094,7 @@
           <a:p>
             <a:fld id="{E0E47B38-4403-474D-B901-AA01AFFF0327}" type="datetimeFigureOut">
               <a:rPr lang="en-US" smtClean="0"/>
-              <a:t>4/29/24</a:t>
+              <a:t>3/6/26</a:t>
             </a:fld>
             <a:endParaRPr lang="en-US"/>
           </a:p>
@@ -2644,7 +2304,7 @@
           <a:p>
             <a:fld id="{E0E47B38-4403-474D-B901-AA01AFFF0327}" type="datetimeFigureOut">
               <a:rPr lang="en-US" smtClean="0"/>
-              <a:t>4/29/24</a:t>
+              <a:t>3/6/26</a:t>
             </a:fld>
             <a:endParaRPr lang="en-US"/>
           </a:p>
@@ -3567,7 +3227,7 @@
           <a:p>
             <a:fld id="{E0E47B38-4403-474D-B901-AA01AFFF0327}" type="datetimeFigureOut">
               <a:rPr lang="en-US" smtClean="0"/>
-              <a:t>4/29/24</a:t>
+              <a:t>3/6/26</a:t>
             </a:fld>
             <a:endParaRPr lang="en-US"/>
           </a:p>
@@ -3843,7 +3503,7 @@
           <a:p>
             <a:fld id="{E0E47B38-4403-474D-B901-AA01AFFF0327}" type="datetimeFigureOut">
               <a:rPr lang="en-US" smtClean="0"/>
-              <a:t>4/29/24</a:t>
+              <a:t>3/6/26</a:t>
             </a:fld>
             <a:endParaRPr lang="en-US"/>
           </a:p>
@@ -4111,7 +3771,7 @@
           <a:p>
             <a:fld id="{E0E47B38-4403-474D-B901-AA01AFFF0327}" type="datetimeFigureOut">
               <a:rPr lang="en-US" smtClean="0"/>
-              <a:t>4/29/24</a:t>
+              <a:t>3/6/26</a:t>
             </a:fld>
             <a:endParaRPr lang="en-US"/>
           </a:p>
@@ -4526,7 +4186,7 @@
           <a:p>
             <a:fld id="{E0E47B38-4403-474D-B901-AA01AFFF0327}" type="datetimeFigureOut">
               <a:rPr lang="en-US" smtClean="0"/>
-              <a:t>4/29/24</a:t>
+              <a:t>3/6/26</a:t>
             </a:fld>
             <a:endParaRPr lang="en-US"/>
           </a:p>
@@ -4668,7 +4328,7 @@
           <a:p>
             <a:fld id="{E0E47B38-4403-474D-B901-AA01AFFF0327}" type="datetimeFigureOut">
               <a:rPr lang="en-US" smtClean="0"/>
-              <a:t>4/29/24</a:t>
+              <a:t>3/6/26</a:t>
             </a:fld>
             <a:endParaRPr lang="en-US"/>
           </a:p>
@@ -4781,7 +4441,7 @@
           <a:p>
             <a:fld id="{E0E47B38-4403-474D-B901-AA01AFFF0327}" type="datetimeFigureOut">
               <a:rPr lang="en-US" smtClean="0"/>
-              <a:t>4/29/24</a:t>
+              <a:t>3/6/26</a:t>
             </a:fld>
             <a:endParaRPr lang="en-US"/>
           </a:p>
@@ -5094,7 +4754,7 @@
           <a:p>
             <a:fld id="{E0E47B38-4403-474D-B901-AA01AFFF0327}" type="datetimeFigureOut">
               <a:rPr lang="en-US" smtClean="0"/>
-              <a:t>4/29/24</a:t>
+              <a:t>3/6/26</a:t>
             </a:fld>
             <a:endParaRPr lang="en-US"/>
           </a:p>
@@ -5383,7 +5043,7 @@
           <a:p>
             <a:fld id="{E0E47B38-4403-474D-B901-AA01AFFF0327}" type="datetimeFigureOut">
               <a:rPr lang="en-US" smtClean="0"/>
-              <a:t>4/29/24</a:t>
+              <a:t>3/6/26</a:t>
             </a:fld>
             <a:endParaRPr lang="en-US"/>
           </a:p>
@@ -5626,7 +5286,7 @@
           <a:p>
             <a:fld id="{E0E47B38-4403-474D-B901-AA01AFFF0327}" type="datetimeFigureOut">
               <a:rPr lang="en-US" smtClean="0"/>
-              <a:t>4/29/24</a:t>
+              <a:t>3/6/26</a:t>
             </a:fld>
             <a:endParaRPr lang="en-US"/>
           </a:p>
@@ -6579,102 +6239,22 @@
       </p:sp>
       <p:sp>
         <p:nvSpPr>
-          <p:cNvPr id="4" name="Text Placeholder 3">
-            <a:extLst>
-              <a:ext uri="{FF2B5EF4-FFF2-40B4-BE49-F238E27FC236}">
-                <a16:creationId xmlns:a16="http://schemas.microsoft.com/office/drawing/2014/main" id="{696BCD64-7D07-7275-9161-A544A4FFA03A}"/>
-              </a:ext>
-            </a:extLst>
-          </p:cNvPr>
-          <p:cNvSpPr>
-            <a:spLocks noGrp="1"/>
-          </p:cNvSpPr>
-          <p:nvPr>
-            <p:ph type="body" sz="quarter" idx="12"/>
-          </p:nvPr>
+          <p:cNvPr id="6" name="Text Placeholder 3">
+            <a:extLst>
+              <a:ext uri="{FF2B5EF4-FFF2-40B4-BE49-F238E27FC236}">
+                <a16:creationId xmlns:a16="http://schemas.microsoft.com/office/drawing/2014/main" id="{667A7450-5E4F-62F0-3B59-3CF8D4B2EAA4}"/>
+              </a:ext>
+            </a:extLst>
+          </p:cNvPr>
+          <p:cNvSpPr txBox="1">
+            <a:spLocks/>
+          </p:cNvSpPr>
+          <p:nvPr/>
         </p:nvSpPr>
         <p:spPr>
           <a:xfrm>
-            <a:off x="503659" y="1867010"/>
-            <a:ext cx="5592341" cy="3994529"/>
-          </a:xfrm>
-        </p:spPr>
-        <p:txBody>
-          <a:bodyPr/>
-          <a:lstStyle/>
-          <a:p>
-            <a:r>
-              <a:rPr lang="en-US" dirty="0"/>
-              <a:t>Community licensing</a:t>
-            </a:r>
-          </a:p>
-          <a:p>
-            <a:pPr lvl="1"/>
-            <a:r>
-              <a:rPr lang="en-US" dirty="0"/>
-              <a:t>For when you are extending existing software, it is easiest to use the same license as the existing project.</a:t>
-            </a:r>
-          </a:p>
-          <a:p>
-            <a:r>
-              <a:rPr lang="en-US" dirty="0"/>
-              <a:t>Permissive licensing</a:t>
-            </a:r>
-          </a:p>
-          <a:p>
-            <a:pPr lvl="1"/>
-            <a:r>
-              <a:rPr lang="en-US" dirty="0"/>
-              <a:t>Anybody can do anything they want with your software</a:t>
-            </a:r>
-          </a:p>
-          <a:p>
-            <a:pPr lvl="1"/>
-            <a:r>
-              <a:rPr lang="en-US" dirty="0"/>
-              <a:t>Includes making closed source versions</a:t>
-            </a:r>
-          </a:p>
-          <a:p>
-            <a:r>
-              <a:rPr lang="en-US" dirty="0"/>
-              <a:t>Non-commercial licensing</a:t>
-            </a:r>
-          </a:p>
-          <a:p>
-            <a:pPr lvl="1"/>
-            <a:r>
-              <a:rPr lang="en-US" dirty="0"/>
-              <a:t>Anybody can do almost anything with your software…</a:t>
-            </a:r>
-          </a:p>
-          <a:p>
-            <a:pPr lvl="1"/>
-            <a:r>
-              <a:rPr lang="en-US" dirty="0"/>
-              <a:t>…except making closed source versions.</a:t>
-            </a:r>
-          </a:p>
-        </p:txBody>
-      </p:sp>
-      <p:sp>
-        <p:nvSpPr>
-          <p:cNvPr id="6" name="Text Placeholder 3">
-            <a:extLst>
-              <a:ext uri="{FF2B5EF4-FFF2-40B4-BE49-F238E27FC236}">
-                <a16:creationId xmlns:a16="http://schemas.microsoft.com/office/drawing/2014/main" id="{667A7450-5E4F-62F0-3B59-3CF8D4B2EAA4}"/>
-              </a:ext>
-            </a:extLst>
-          </p:cNvPr>
-          <p:cNvSpPr txBox="1">
-            <a:spLocks/>
-          </p:cNvSpPr>
-          <p:nvPr/>
-        </p:nvSpPr>
-        <p:spPr>
-          <a:xfrm>
-            <a:off x="7674429" y="1867010"/>
-            <a:ext cx="4005230" cy="3994529"/>
+            <a:off x="6455087" y="2691019"/>
+            <a:ext cx="2629643" cy="554510"/>
           </a:xfrm>
           <a:prstGeom prst="rect">
             <a:avLst/>
@@ -6867,47 +6447,2485 @@
               <a:buNone/>
             </a:pPr>
             <a:r>
-              <a:rPr lang="en-US" dirty="0"/>
-              <a:t>Permissive licenses:</a:t>
-            </a:r>
-          </a:p>
-          <a:p>
-            <a:r>
-              <a:rPr lang="en-US" dirty="0"/>
-              <a:t>Apache 2.0</a:t>
-            </a:r>
-          </a:p>
-          <a:p>
-            <a:r>
-              <a:rPr lang="en-US" dirty="0"/>
-              <a:t>MIT</a:t>
-            </a:r>
-          </a:p>
+              <a:rPr lang="en-US" sz="1700" b="1" dirty="0"/>
+              <a:t>MIT  	Apache 2.0</a:t>
+            </a:r>
+          </a:p>
+        </p:txBody>
+      </p:sp>
+      <p:cxnSp>
+        <p:nvCxnSpPr>
+          <p:cNvPr id="9" name="Straight Arrow Connector 8">
+            <a:extLst>
+              <a:ext uri="{FF2B5EF4-FFF2-40B4-BE49-F238E27FC236}">
+                <a16:creationId xmlns:a16="http://schemas.microsoft.com/office/drawing/2014/main" id="{38E91936-D3AB-686A-AF62-E00A839A113C}"/>
+              </a:ext>
+            </a:extLst>
+          </p:cNvPr>
+          <p:cNvCxnSpPr>
+            <a:cxnSpLocks/>
+          </p:cNvCxnSpPr>
+          <p:nvPr/>
+        </p:nvCxnSpPr>
+        <p:spPr>
+          <a:xfrm>
+            <a:off x="1858433" y="3924952"/>
+            <a:ext cx="7366000" cy="0"/>
+          </a:xfrm>
+          <a:prstGeom prst="straightConnector1">
+            <a:avLst/>
+          </a:prstGeom>
+          <a:ln>
+            <a:solidFill>
+              <a:srgbClr val="235DE3"/>
+            </a:solidFill>
+            <a:tailEnd type="triangle"/>
+          </a:ln>
+        </p:spPr>
+        <p:style>
+          <a:lnRef idx="2">
+            <a:schemeClr val="accent1"/>
+          </a:lnRef>
+          <a:fillRef idx="0">
+            <a:schemeClr val="accent1"/>
+          </a:fillRef>
+          <a:effectRef idx="1">
+            <a:schemeClr val="accent1"/>
+          </a:effectRef>
+          <a:fontRef idx="minor">
+            <a:schemeClr val="tx1"/>
+          </a:fontRef>
+        </p:style>
+      </p:cxnSp>
+      <p:cxnSp>
+        <p:nvCxnSpPr>
+          <p:cNvPr id="10" name="Straight Arrow Connector 9">
+            <a:extLst>
+              <a:ext uri="{FF2B5EF4-FFF2-40B4-BE49-F238E27FC236}">
+                <a16:creationId xmlns:a16="http://schemas.microsoft.com/office/drawing/2014/main" id="{791E84B6-0C22-5A53-1C7D-CBB107C76BEB}"/>
+              </a:ext>
+            </a:extLst>
+          </p:cNvPr>
+          <p:cNvCxnSpPr>
+            <a:cxnSpLocks/>
+          </p:cNvCxnSpPr>
+          <p:nvPr/>
+        </p:nvCxnSpPr>
+        <p:spPr>
+          <a:xfrm flipV="1">
+            <a:off x="5541433" y="1745437"/>
+            <a:ext cx="0" cy="4359030"/>
+          </a:xfrm>
+          <a:prstGeom prst="straightConnector1">
+            <a:avLst/>
+          </a:prstGeom>
+          <a:ln>
+            <a:solidFill>
+              <a:srgbClr val="235DE3"/>
+            </a:solidFill>
+            <a:tailEnd type="triangle"/>
+          </a:ln>
+        </p:spPr>
+        <p:style>
+          <a:lnRef idx="2">
+            <a:schemeClr val="accent1"/>
+          </a:lnRef>
+          <a:fillRef idx="0">
+            <a:schemeClr val="accent1"/>
+          </a:fillRef>
+          <a:effectRef idx="1">
+            <a:schemeClr val="accent1"/>
+          </a:effectRef>
+          <a:fontRef idx="minor">
+            <a:schemeClr val="tx1"/>
+          </a:fontRef>
+        </p:style>
+      </p:cxnSp>
+      <p:sp>
+        <p:nvSpPr>
+          <p:cNvPr id="16" name="Text Placeholder 3">
+            <a:extLst>
+              <a:ext uri="{FF2B5EF4-FFF2-40B4-BE49-F238E27FC236}">
+                <a16:creationId xmlns:a16="http://schemas.microsoft.com/office/drawing/2014/main" id="{17A7A6F4-47D8-056F-F007-1FC8850133EB}"/>
+              </a:ext>
+            </a:extLst>
+          </p:cNvPr>
+          <p:cNvSpPr txBox="1">
+            <a:spLocks/>
+          </p:cNvSpPr>
+          <p:nvPr/>
+        </p:nvSpPr>
+        <p:spPr>
+          <a:xfrm>
+            <a:off x="8787903" y="3477303"/>
+            <a:ext cx="4005230" cy="495952"/>
+          </a:xfrm>
+          <a:prstGeom prst="rect">
+            <a:avLst/>
+          </a:prstGeom>
+        </p:spPr>
+        <p:txBody>
+          <a:bodyPr vert="horz" lIns="91440" tIns="45720" rIns="91440" bIns="45720" rtlCol="0">
+            <a:normAutofit/>
+          </a:bodyPr>
+          <a:lstStyle>
+            <a:lvl1pPr marL="380990" indent="-380990" algn="l" defTabSz="914400" rtl="0" eaLnBrk="1" latinLnBrk="0" hangingPunct="1">
+              <a:lnSpc>
+                <a:spcPct val="90000"/>
+              </a:lnSpc>
+              <a:spcBef>
+                <a:spcPts val="1000"/>
+              </a:spcBef>
+              <a:buClr>
+                <a:srgbClr val="235EE2"/>
+              </a:buClr>
+              <a:buSzPct val="70000"/>
+              <a:buFont typeface="Courier New"/>
+              <a:buChar char="o"/>
+              <a:defRPr sz="1867" b="0" i="0" kern="1200" baseline="0">
+                <a:solidFill>
+                  <a:schemeClr val="tx1">
+                    <a:lumMod val="75000"/>
+                    <a:lumOff val="25000"/>
+                  </a:schemeClr>
+                </a:solidFill>
+                <a:latin typeface="Aptos" panose="020B0004020202020204" pitchFamily="34" charset="0"/>
+                <a:ea typeface="+mn-ea"/>
+                <a:cs typeface="Aptos" panose="020B0004020202020204" pitchFamily="34" charset="0"/>
+              </a:defRPr>
+            </a:lvl1pPr>
+            <a:lvl2pPr marL="685800" indent="-228600" algn="l" defTabSz="914400" rtl="0" eaLnBrk="1" latinLnBrk="0" hangingPunct="1">
+              <a:lnSpc>
+                <a:spcPct val="90000"/>
+              </a:lnSpc>
+              <a:spcBef>
+                <a:spcPts val="500"/>
+              </a:spcBef>
+              <a:buClr>
+                <a:srgbClr val="235EE2"/>
+              </a:buClr>
+              <a:buSzPct val="70000"/>
+              <a:buFont typeface="Arial" panose="020B0604020202020204" pitchFamily="34" charset="0"/>
+              <a:buChar char="•"/>
+              <a:defRPr sz="1600" kern="1200" baseline="0">
+                <a:solidFill>
+                  <a:schemeClr val="tx1">
+                    <a:lumMod val="65000"/>
+                    <a:lumOff val="35000"/>
+                  </a:schemeClr>
+                </a:solidFill>
+                <a:latin typeface="Helvetica Light"/>
+                <a:ea typeface="+mn-ea"/>
+                <a:cs typeface="Helvetica Light"/>
+              </a:defRPr>
+            </a:lvl2pPr>
+            <a:lvl3pPr marL="1143000" indent="-228600" algn="l" defTabSz="914400" rtl="0" eaLnBrk="1" latinLnBrk="0" hangingPunct="1">
+              <a:lnSpc>
+                <a:spcPct val="90000"/>
+              </a:lnSpc>
+              <a:spcBef>
+                <a:spcPts val="500"/>
+              </a:spcBef>
+              <a:buFont typeface="Arial" panose="020B0604020202020204" pitchFamily="34" charset="0"/>
+              <a:buChar char="•"/>
+              <a:defRPr sz="2000" kern="1200">
+                <a:solidFill>
+                  <a:schemeClr val="tx1"/>
+                </a:solidFill>
+                <a:latin typeface="Avenir Heavy"/>
+                <a:ea typeface="+mn-ea"/>
+                <a:cs typeface="Avenir Heavy"/>
+              </a:defRPr>
+            </a:lvl3pPr>
+            <a:lvl4pPr marL="1600200" indent="-228600" algn="l" defTabSz="914400" rtl="0" eaLnBrk="1" latinLnBrk="0" hangingPunct="1">
+              <a:lnSpc>
+                <a:spcPct val="90000"/>
+              </a:lnSpc>
+              <a:spcBef>
+                <a:spcPts val="500"/>
+              </a:spcBef>
+              <a:buFont typeface="Arial" panose="020B0604020202020204" pitchFamily="34" charset="0"/>
+              <a:buChar char="•"/>
+              <a:defRPr sz="1800" kern="1200">
+                <a:solidFill>
+                  <a:schemeClr val="tx1"/>
+                </a:solidFill>
+                <a:latin typeface="Avenir Heavy"/>
+                <a:ea typeface="+mn-ea"/>
+                <a:cs typeface="Avenir Heavy"/>
+              </a:defRPr>
+            </a:lvl4pPr>
+            <a:lvl5pPr marL="2057400" indent="-228600" algn="l" defTabSz="914400" rtl="0" eaLnBrk="1" latinLnBrk="0" hangingPunct="1">
+              <a:lnSpc>
+                <a:spcPct val="90000"/>
+              </a:lnSpc>
+              <a:spcBef>
+                <a:spcPts val="500"/>
+              </a:spcBef>
+              <a:buFont typeface="Arial" panose="020B0604020202020204" pitchFamily="34" charset="0"/>
+              <a:buChar char="•"/>
+              <a:defRPr sz="1800" kern="1200">
+                <a:solidFill>
+                  <a:schemeClr val="tx1"/>
+                </a:solidFill>
+                <a:latin typeface="Avenir Heavy"/>
+                <a:ea typeface="+mn-ea"/>
+                <a:cs typeface="Avenir Heavy"/>
+              </a:defRPr>
+            </a:lvl5pPr>
+            <a:lvl6pPr marL="2514600" indent="-228600" algn="l" defTabSz="914400" rtl="0" eaLnBrk="1" latinLnBrk="0" hangingPunct="1">
+              <a:lnSpc>
+                <a:spcPct val="90000"/>
+              </a:lnSpc>
+              <a:spcBef>
+                <a:spcPts val="500"/>
+              </a:spcBef>
+              <a:buFont typeface="Arial" panose="020B0604020202020204" pitchFamily="34" charset="0"/>
+              <a:buChar char="•"/>
+              <a:defRPr sz="1800" kern="1200">
+                <a:solidFill>
+                  <a:schemeClr val="tx1"/>
+                </a:solidFill>
+                <a:latin typeface="+mn-lt"/>
+                <a:ea typeface="+mn-ea"/>
+                <a:cs typeface="+mn-cs"/>
+              </a:defRPr>
+            </a:lvl6pPr>
+            <a:lvl7pPr marL="2971800" indent="-228600" algn="l" defTabSz="914400" rtl="0" eaLnBrk="1" latinLnBrk="0" hangingPunct="1">
+              <a:lnSpc>
+                <a:spcPct val="90000"/>
+              </a:lnSpc>
+              <a:spcBef>
+                <a:spcPts val="500"/>
+              </a:spcBef>
+              <a:buFont typeface="Arial" panose="020B0604020202020204" pitchFamily="34" charset="0"/>
+              <a:buChar char="•"/>
+              <a:defRPr sz="1800" kern="1200">
+                <a:solidFill>
+                  <a:schemeClr val="tx1"/>
+                </a:solidFill>
+                <a:latin typeface="+mn-lt"/>
+                <a:ea typeface="+mn-ea"/>
+                <a:cs typeface="+mn-cs"/>
+              </a:defRPr>
+            </a:lvl7pPr>
+            <a:lvl8pPr marL="3429000" indent="-228600" algn="l" defTabSz="914400" rtl="0" eaLnBrk="1" latinLnBrk="0" hangingPunct="1">
+              <a:lnSpc>
+                <a:spcPct val="90000"/>
+              </a:lnSpc>
+              <a:spcBef>
+                <a:spcPts val="500"/>
+              </a:spcBef>
+              <a:buFont typeface="Arial" panose="020B0604020202020204" pitchFamily="34" charset="0"/>
+              <a:buChar char="•"/>
+              <a:defRPr sz="1800" kern="1200">
+                <a:solidFill>
+                  <a:schemeClr val="tx1"/>
+                </a:solidFill>
+                <a:latin typeface="+mn-lt"/>
+                <a:ea typeface="+mn-ea"/>
+                <a:cs typeface="+mn-cs"/>
+              </a:defRPr>
+            </a:lvl8pPr>
+            <a:lvl9pPr marL="3886200" indent="-228600" algn="l" defTabSz="914400" rtl="0" eaLnBrk="1" latinLnBrk="0" hangingPunct="1">
+              <a:lnSpc>
+                <a:spcPct val="90000"/>
+              </a:lnSpc>
+              <a:spcBef>
+                <a:spcPts val="500"/>
+              </a:spcBef>
+              <a:buFont typeface="Arial" panose="020B0604020202020204" pitchFamily="34" charset="0"/>
+              <a:buChar char="•"/>
+              <a:defRPr sz="1800" kern="1200">
+                <a:solidFill>
+                  <a:schemeClr val="tx1"/>
+                </a:solidFill>
+                <a:latin typeface="+mn-lt"/>
+                <a:ea typeface="+mn-ea"/>
+                <a:cs typeface="+mn-cs"/>
+              </a:defRPr>
+            </a:lvl9pPr>
+          </a:lstStyle>
           <a:p>
             <a:pPr marL="0" indent="0">
               <a:buNone/>
             </a:pPr>
-            <a:endParaRPr lang="en-US" dirty="0"/>
-          </a:p>
+            <a:r>
+              <a:rPr lang="en-US" dirty="0"/>
+              <a:t>Commercial </a:t>
+            </a:r>
+          </a:p>
+        </p:txBody>
+      </p:sp>
+      <p:sp>
+        <p:nvSpPr>
+          <p:cNvPr id="18" name="Text Placeholder 3">
+            <a:extLst>
+              <a:ext uri="{FF2B5EF4-FFF2-40B4-BE49-F238E27FC236}">
+                <a16:creationId xmlns:a16="http://schemas.microsoft.com/office/drawing/2014/main" id="{93562274-C1E5-BED9-1536-5571E3098007}"/>
+              </a:ext>
+            </a:extLst>
+          </p:cNvPr>
+          <p:cNvSpPr txBox="1">
+            <a:spLocks/>
+          </p:cNvSpPr>
+          <p:nvPr/>
+        </p:nvSpPr>
+        <p:spPr>
+          <a:xfrm>
+            <a:off x="1324892" y="3463843"/>
+            <a:ext cx="4005230" cy="495952"/>
+          </a:xfrm>
+          <a:prstGeom prst="rect">
+            <a:avLst/>
+          </a:prstGeom>
+        </p:spPr>
+        <p:txBody>
+          <a:bodyPr vert="horz" lIns="91440" tIns="45720" rIns="91440" bIns="45720" rtlCol="0">
+            <a:normAutofit/>
+          </a:bodyPr>
+          <a:lstStyle>
+            <a:lvl1pPr marL="380990" indent="-380990" algn="l" defTabSz="914400" rtl="0" eaLnBrk="1" latinLnBrk="0" hangingPunct="1">
+              <a:lnSpc>
+                <a:spcPct val="90000"/>
+              </a:lnSpc>
+              <a:spcBef>
+                <a:spcPts val="1000"/>
+              </a:spcBef>
+              <a:buClr>
+                <a:srgbClr val="235EE2"/>
+              </a:buClr>
+              <a:buSzPct val="70000"/>
+              <a:buFont typeface="Courier New"/>
+              <a:buChar char="o"/>
+              <a:defRPr sz="1867" b="0" i="0" kern="1200" baseline="0">
+                <a:solidFill>
+                  <a:schemeClr val="tx1">
+                    <a:lumMod val="75000"/>
+                    <a:lumOff val="25000"/>
+                  </a:schemeClr>
+                </a:solidFill>
+                <a:latin typeface="Aptos" panose="020B0004020202020204" pitchFamily="34" charset="0"/>
+                <a:ea typeface="+mn-ea"/>
+                <a:cs typeface="Aptos" panose="020B0004020202020204" pitchFamily="34" charset="0"/>
+              </a:defRPr>
+            </a:lvl1pPr>
+            <a:lvl2pPr marL="685800" indent="-228600" algn="l" defTabSz="914400" rtl="0" eaLnBrk="1" latinLnBrk="0" hangingPunct="1">
+              <a:lnSpc>
+                <a:spcPct val="90000"/>
+              </a:lnSpc>
+              <a:spcBef>
+                <a:spcPts val="500"/>
+              </a:spcBef>
+              <a:buClr>
+                <a:srgbClr val="235EE2"/>
+              </a:buClr>
+              <a:buSzPct val="70000"/>
+              <a:buFont typeface="Arial" panose="020B0604020202020204" pitchFamily="34" charset="0"/>
+              <a:buChar char="•"/>
+              <a:defRPr sz="1600" kern="1200" baseline="0">
+                <a:solidFill>
+                  <a:schemeClr val="tx1">
+                    <a:lumMod val="65000"/>
+                    <a:lumOff val="35000"/>
+                  </a:schemeClr>
+                </a:solidFill>
+                <a:latin typeface="Helvetica Light"/>
+                <a:ea typeface="+mn-ea"/>
+                <a:cs typeface="Helvetica Light"/>
+              </a:defRPr>
+            </a:lvl2pPr>
+            <a:lvl3pPr marL="1143000" indent="-228600" algn="l" defTabSz="914400" rtl="0" eaLnBrk="1" latinLnBrk="0" hangingPunct="1">
+              <a:lnSpc>
+                <a:spcPct val="90000"/>
+              </a:lnSpc>
+              <a:spcBef>
+                <a:spcPts val="500"/>
+              </a:spcBef>
+              <a:buFont typeface="Arial" panose="020B0604020202020204" pitchFamily="34" charset="0"/>
+              <a:buChar char="•"/>
+              <a:defRPr sz="2000" kern="1200">
+                <a:solidFill>
+                  <a:schemeClr val="tx1"/>
+                </a:solidFill>
+                <a:latin typeface="Avenir Heavy"/>
+                <a:ea typeface="+mn-ea"/>
+                <a:cs typeface="Avenir Heavy"/>
+              </a:defRPr>
+            </a:lvl3pPr>
+            <a:lvl4pPr marL="1600200" indent="-228600" algn="l" defTabSz="914400" rtl="0" eaLnBrk="1" latinLnBrk="0" hangingPunct="1">
+              <a:lnSpc>
+                <a:spcPct val="90000"/>
+              </a:lnSpc>
+              <a:spcBef>
+                <a:spcPts val="500"/>
+              </a:spcBef>
+              <a:buFont typeface="Arial" panose="020B0604020202020204" pitchFamily="34" charset="0"/>
+              <a:buChar char="•"/>
+              <a:defRPr sz="1800" kern="1200">
+                <a:solidFill>
+                  <a:schemeClr val="tx1"/>
+                </a:solidFill>
+                <a:latin typeface="Avenir Heavy"/>
+                <a:ea typeface="+mn-ea"/>
+                <a:cs typeface="Avenir Heavy"/>
+              </a:defRPr>
+            </a:lvl4pPr>
+            <a:lvl5pPr marL="2057400" indent="-228600" algn="l" defTabSz="914400" rtl="0" eaLnBrk="1" latinLnBrk="0" hangingPunct="1">
+              <a:lnSpc>
+                <a:spcPct val="90000"/>
+              </a:lnSpc>
+              <a:spcBef>
+                <a:spcPts val="500"/>
+              </a:spcBef>
+              <a:buFont typeface="Arial" panose="020B0604020202020204" pitchFamily="34" charset="0"/>
+              <a:buChar char="•"/>
+              <a:defRPr sz="1800" kern="1200">
+                <a:solidFill>
+                  <a:schemeClr val="tx1"/>
+                </a:solidFill>
+                <a:latin typeface="Avenir Heavy"/>
+                <a:ea typeface="+mn-ea"/>
+                <a:cs typeface="Avenir Heavy"/>
+              </a:defRPr>
+            </a:lvl5pPr>
+            <a:lvl6pPr marL="2514600" indent="-228600" algn="l" defTabSz="914400" rtl="0" eaLnBrk="1" latinLnBrk="0" hangingPunct="1">
+              <a:lnSpc>
+                <a:spcPct val="90000"/>
+              </a:lnSpc>
+              <a:spcBef>
+                <a:spcPts val="500"/>
+              </a:spcBef>
+              <a:buFont typeface="Arial" panose="020B0604020202020204" pitchFamily="34" charset="0"/>
+              <a:buChar char="•"/>
+              <a:defRPr sz="1800" kern="1200">
+                <a:solidFill>
+                  <a:schemeClr val="tx1"/>
+                </a:solidFill>
+                <a:latin typeface="+mn-lt"/>
+                <a:ea typeface="+mn-ea"/>
+                <a:cs typeface="+mn-cs"/>
+              </a:defRPr>
+            </a:lvl6pPr>
+            <a:lvl7pPr marL="2971800" indent="-228600" algn="l" defTabSz="914400" rtl="0" eaLnBrk="1" latinLnBrk="0" hangingPunct="1">
+              <a:lnSpc>
+                <a:spcPct val="90000"/>
+              </a:lnSpc>
+              <a:spcBef>
+                <a:spcPts val="500"/>
+              </a:spcBef>
+              <a:buFont typeface="Arial" panose="020B0604020202020204" pitchFamily="34" charset="0"/>
+              <a:buChar char="•"/>
+              <a:defRPr sz="1800" kern="1200">
+                <a:solidFill>
+                  <a:schemeClr val="tx1"/>
+                </a:solidFill>
+                <a:latin typeface="+mn-lt"/>
+                <a:ea typeface="+mn-ea"/>
+                <a:cs typeface="+mn-cs"/>
+              </a:defRPr>
+            </a:lvl7pPr>
+            <a:lvl8pPr marL="3429000" indent="-228600" algn="l" defTabSz="914400" rtl="0" eaLnBrk="1" latinLnBrk="0" hangingPunct="1">
+              <a:lnSpc>
+                <a:spcPct val="90000"/>
+              </a:lnSpc>
+              <a:spcBef>
+                <a:spcPts val="500"/>
+              </a:spcBef>
+              <a:buFont typeface="Arial" panose="020B0604020202020204" pitchFamily="34" charset="0"/>
+              <a:buChar char="•"/>
+              <a:defRPr sz="1800" kern="1200">
+                <a:solidFill>
+                  <a:schemeClr val="tx1"/>
+                </a:solidFill>
+                <a:latin typeface="+mn-lt"/>
+                <a:ea typeface="+mn-ea"/>
+                <a:cs typeface="+mn-cs"/>
+              </a:defRPr>
+            </a:lvl8pPr>
+            <a:lvl9pPr marL="3886200" indent="-228600" algn="l" defTabSz="914400" rtl="0" eaLnBrk="1" latinLnBrk="0" hangingPunct="1">
+              <a:lnSpc>
+                <a:spcPct val="90000"/>
+              </a:lnSpc>
+              <a:spcBef>
+                <a:spcPts val="500"/>
+              </a:spcBef>
+              <a:buFont typeface="Arial" panose="020B0604020202020204" pitchFamily="34" charset="0"/>
+              <a:buChar char="•"/>
+              <a:defRPr sz="1800" kern="1200">
+                <a:solidFill>
+                  <a:schemeClr val="tx1"/>
+                </a:solidFill>
+                <a:latin typeface="+mn-lt"/>
+                <a:ea typeface="+mn-ea"/>
+                <a:cs typeface="+mn-cs"/>
+              </a:defRPr>
+            </a:lvl9pPr>
+          </a:lstStyle>
           <a:p>
             <a:pPr marL="0" indent="0">
               <a:buNone/>
             </a:pPr>
             <a:r>
               <a:rPr lang="en-US" dirty="0"/>
-              <a:t>Non-commercial:</a:t>
-            </a:r>
-          </a:p>
-          <a:p>
+              <a:t>Non-commercial </a:t>
+            </a:r>
+          </a:p>
+        </p:txBody>
+      </p:sp>
+      <p:sp>
+        <p:nvSpPr>
+          <p:cNvPr id="19" name="Text Placeholder 3">
+            <a:extLst>
+              <a:ext uri="{FF2B5EF4-FFF2-40B4-BE49-F238E27FC236}">
+                <a16:creationId xmlns:a16="http://schemas.microsoft.com/office/drawing/2014/main" id="{AE189D10-63C7-52F1-954C-FD499394D9CF}"/>
+              </a:ext>
+            </a:extLst>
+          </p:cNvPr>
+          <p:cNvSpPr txBox="1">
+            <a:spLocks/>
+          </p:cNvSpPr>
+          <p:nvPr/>
+        </p:nvSpPr>
+        <p:spPr>
+          <a:xfrm>
+            <a:off x="5671814" y="1515644"/>
+            <a:ext cx="4005230" cy="495952"/>
+          </a:xfrm>
+          <a:prstGeom prst="rect">
+            <a:avLst/>
+          </a:prstGeom>
+        </p:spPr>
+        <p:txBody>
+          <a:bodyPr vert="horz" lIns="91440" tIns="45720" rIns="91440" bIns="45720" rtlCol="0">
+            <a:normAutofit/>
+          </a:bodyPr>
+          <a:lstStyle>
+            <a:lvl1pPr marL="380990" indent="-380990" algn="l" defTabSz="914400" rtl="0" eaLnBrk="1" latinLnBrk="0" hangingPunct="1">
+              <a:lnSpc>
+                <a:spcPct val="90000"/>
+              </a:lnSpc>
+              <a:spcBef>
+                <a:spcPts val="1000"/>
+              </a:spcBef>
+              <a:buClr>
+                <a:srgbClr val="235EE2"/>
+              </a:buClr>
+              <a:buSzPct val="70000"/>
+              <a:buFont typeface="Courier New"/>
+              <a:buChar char="o"/>
+              <a:defRPr sz="1867" b="0" i="0" kern="1200" baseline="0">
+                <a:solidFill>
+                  <a:schemeClr val="tx1">
+                    <a:lumMod val="75000"/>
+                    <a:lumOff val="25000"/>
+                  </a:schemeClr>
+                </a:solidFill>
+                <a:latin typeface="Aptos" panose="020B0004020202020204" pitchFamily="34" charset="0"/>
+                <a:ea typeface="+mn-ea"/>
+                <a:cs typeface="Aptos" panose="020B0004020202020204" pitchFamily="34" charset="0"/>
+              </a:defRPr>
+            </a:lvl1pPr>
+            <a:lvl2pPr marL="685800" indent="-228600" algn="l" defTabSz="914400" rtl="0" eaLnBrk="1" latinLnBrk="0" hangingPunct="1">
+              <a:lnSpc>
+                <a:spcPct val="90000"/>
+              </a:lnSpc>
+              <a:spcBef>
+                <a:spcPts val="500"/>
+              </a:spcBef>
+              <a:buClr>
+                <a:srgbClr val="235EE2"/>
+              </a:buClr>
+              <a:buSzPct val="70000"/>
+              <a:buFont typeface="Arial" panose="020B0604020202020204" pitchFamily="34" charset="0"/>
+              <a:buChar char="•"/>
+              <a:defRPr sz="1600" kern="1200" baseline="0">
+                <a:solidFill>
+                  <a:schemeClr val="tx1">
+                    <a:lumMod val="65000"/>
+                    <a:lumOff val="35000"/>
+                  </a:schemeClr>
+                </a:solidFill>
+                <a:latin typeface="Helvetica Light"/>
+                <a:ea typeface="+mn-ea"/>
+                <a:cs typeface="Helvetica Light"/>
+              </a:defRPr>
+            </a:lvl2pPr>
+            <a:lvl3pPr marL="1143000" indent="-228600" algn="l" defTabSz="914400" rtl="0" eaLnBrk="1" latinLnBrk="0" hangingPunct="1">
+              <a:lnSpc>
+                <a:spcPct val="90000"/>
+              </a:lnSpc>
+              <a:spcBef>
+                <a:spcPts val="500"/>
+              </a:spcBef>
+              <a:buFont typeface="Arial" panose="020B0604020202020204" pitchFamily="34" charset="0"/>
+              <a:buChar char="•"/>
+              <a:defRPr sz="2000" kern="1200">
+                <a:solidFill>
+                  <a:schemeClr val="tx1"/>
+                </a:solidFill>
+                <a:latin typeface="Avenir Heavy"/>
+                <a:ea typeface="+mn-ea"/>
+                <a:cs typeface="Avenir Heavy"/>
+              </a:defRPr>
+            </a:lvl3pPr>
+            <a:lvl4pPr marL="1600200" indent="-228600" algn="l" defTabSz="914400" rtl="0" eaLnBrk="1" latinLnBrk="0" hangingPunct="1">
+              <a:lnSpc>
+                <a:spcPct val="90000"/>
+              </a:lnSpc>
+              <a:spcBef>
+                <a:spcPts val="500"/>
+              </a:spcBef>
+              <a:buFont typeface="Arial" panose="020B0604020202020204" pitchFamily="34" charset="0"/>
+              <a:buChar char="•"/>
+              <a:defRPr sz="1800" kern="1200">
+                <a:solidFill>
+                  <a:schemeClr val="tx1"/>
+                </a:solidFill>
+                <a:latin typeface="Avenir Heavy"/>
+                <a:ea typeface="+mn-ea"/>
+                <a:cs typeface="Avenir Heavy"/>
+              </a:defRPr>
+            </a:lvl4pPr>
+            <a:lvl5pPr marL="2057400" indent="-228600" algn="l" defTabSz="914400" rtl="0" eaLnBrk="1" latinLnBrk="0" hangingPunct="1">
+              <a:lnSpc>
+                <a:spcPct val="90000"/>
+              </a:lnSpc>
+              <a:spcBef>
+                <a:spcPts val="500"/>
+              </a:spcBef>
+              <a:buFont typeface="Arial" panose="020B0604020202020204" pitchFamily="34" charset="0"/>
+              <a:buChar char="•"/>
+              <a:defRPr sz="1800" kern="1200">
+                <a:solidFill>
+                  <a:schemeClr val="tx1"/>
+                </a:solidFill>
+                <a:latin typeface="Avenir Heavy"/>
+                <a:ea typeface="+mn-ea"/>
+                <a:cs typeface="Avenir Heavy"/>
+              </a:defRPr>
+            </a:lvl5pPr>
+            <a:lvl6pPr marL="2514600" indent="-228600" algn="l" defTabSz="914400" rtl="0" eaLnBrk="1" latinLnBrk="0" hangingPunct="1">
+              <a:lnSpc>
+                <a:spcPct val="90000"/>
+              </a:lnSpc>
+              <a:spcBef>
+                <a:spcPts val="500"/>
+              </a:spcBef>
+              <a:buFont typeface="Arial" panose="020B0604020202020204" pitchFamily="34" charset="0"/>
+              <a:buChar char="•"/>
+              <a:defRPr sz="1800" kern="1200">
+                <a:solidFill>
+                  <a:schemeClr val="tx1"/>
+                </a:solidFill>
+                <a:latin typeface="+mn-lt"/>
+                <a:ea typeface="+mn-ea"/>
+                <a:cs typeface="+mn-cs"/>
+              </a:defRPr>
+            </a:lvl6pPr>
+            <a:lvl7pPr marL="2971800" indent="-228600" algn="l" defTabSz="914400" rtl="0" eaLnBrk="1" latinLnBrk="0" hangingPunct="1">
+              <a:lnSpc>
+                <a:spcPct val="90000"/>
+              </a:lnSpc>
+              <a:spcBef>
+                <a:spcPts val="500"/>
+              </a:spcBef>
+              <a:buFont typeface="Arial" panose="020B0604020202020204" pitchFamily="34" charset="0"/>
+              <a:buChar char="•"/>
+              <a:defRPr sz="1800" kern="1200">
+                <a:solidFill>
+                  <a:schemeClr val="tx1"/>
+                </a:solidFill>
+                <a:latin typeface="+mn-lt"/>
+                <a:ea typeface="+mn-ea"/>
+                <a:cs typeface="+mn-cs"/>
+              </a:defRPr>
+            </a:lvl7pPr>
+            <a:lvl8pPr marL="3429000" indent="-228600" algn="l" defTabSz="914400" rtl="0" eaLnBrk="1" latinLnBrk="0" hangingPunct="1">
+              <a:lnSpc>
+                <a:spcPct val="90000"/>
+              </a:lnSpc>
+              <a:spcBef>
+                <a:spcPts val="500"/>
+              </a:spcBef>
+              <a:buFont typeface="Arial" panose="020B0604020202020204" pitchFamily="34" charset="0"/>
+              <a:buChar char="•"/>
+              <a:defRPr sz="1800" kern="1200">
+                <a:solidFill>
+                  <a:schemeClr val="tx1"/>
+                </a:solidFill>
+                <a:latin typeface="+mn-lt"/>
+                <a:ea typeface="+mn-ea"/>
+                <a:cs typeface="+mn-cs"/>
+              </a:defRPr>
+            </a:lvl8pPr>
+            <a:lvl9pPr marL="3886200" indent="-228600" algn="l" defTabSz="914400" rtl="0" eaLnBrk="1" latinLnBrk="0" hangingPunct="1">
+              <a:lnSpc>
+                <a:spcPct val="90000"/>
+              </a:lnSpc>
+              <a:spcBef>
+                <a:spcPts val="500"/>
+              </a:spcBef>
+              <a:buFont typeface="Arial" panose="020B0604020202020204" pitchFamily="34" charset="0"/>
+              <a:buChar char="•"/>
+              <a:defRPr sz="1800" kern="1200">
+                <a:solidFill>
+                  <a:schemeClr val="tx1"/>
+                </a:solidFill>
+                <a:latin typeface="+mn-lt"/>
+                <a:ea typeface="+mn-ea"/>
+                <a:cs typeface="+mn-cs"/>
+              </a:defRPr>
+            </a:lvl9pPr>
+          </a:lstStyle>
+          <a:p>
+            <a:pPr marL="0" indent="0">
+              <a:buNone/>
+            </a:pPr>
             <a:r>
               <a:rPr lang="en-US" dirty="0"/>
-              <a:t>GNU GPLv3</a:t>
-            </a:r>
-          </a:p>
-          <a:p>
+              <a:t>Permissive</a:t>
+            </a:r>
+          </a:p>
+        </p:txBody>
+      </p:sp>
+      <p:sp>
+        <p:nvSpPr>
+          <p:cNvPr id="20" name="Text Placeholder 3">
+            <a:extLst>
+              <a:ext uri="{FF2B5EF4-FFF2-40B4-BE49-F238E27FC236}">
+                <a16:creationId xmlns:a16="http://schemas.microsoft.com/office/drawing/2014/main" id="{9C9F0CDD-7CB2-DCAA-68D2-E89908CFEE43}"/>
+              </a:ext>
+            </a:extLst>
+          </p:cNvPr>
+          <p:cNvSpPr txBox="1">
+            <a:spLocks/>
+          </p:cNvSpPr>
+          <p:nvPr/>
+        </p:nvSpPr>
+        <p:spPr>
+          <a:xfrm>
+            <a:off x="5541433" y="5953098"/>
+            <a:ext cx="4005230" cy="495952"/>
+          </a:xfrm>
+          <a:prstGeom prst="rect">
+            <a:avLst/>
+          </a:prstGeom>
+        </p:spPr>
+        <p:txBody>
+          <a:bodyPr vert="horz" lIns="91440" tIns="45720" rIns="91440" bIns="45720" rtlCol="0">
+            <a:normAutofit/>
+          </a:bodyPr>
+          <a:lstStyle>
+            <a:lvl1pPr marL="380990" indent="-380990" algn="l" defTabSz="914400" rtl="0" eaLnBrk="1" latinLnBrk="0" hangingPunct="1">
+              <a:lnSpc>
+                <a:spcPct val="90000"/>
+              </a:lnSpc>
+              <a:spcBef>
+                <a:spcPts val="1000"/>
+              </a:spcBef>
+              <a:buClr>
+                <a:srgbClr val="235EE2"/>
+              </a:buClr>
+              <a:buSzPct val="70000"/>
+              <a:buFont typeface="Courier New"/>
+              <a:buChar char="o"/>
+              <a:defRPr sz="1867" b="0" i="0" kern="1200" baseline="0">
+                <a:solidFill>
+                  <a:schemeClr val="tx1">
+                    <a:lumMod val="75000"/>
+                    <a:lumOff val="25000"/>
+                  </a:schemeClr>
+                </a:solidFill>
+                <a:latin typeface="Aptos" panose="020B0004020202020204" pitchFamily="34" charset="0"/>
+                <a:ea typeface="+mn-ea"/>
+                <a:cs typeface="Aptos" panose="020B0004020202020204" pitchFamily="34" charset="0"/>
+              </a:defRPr>
+            </a:lvl1pPr>
+            <a:lvl2pPr marL="685800" indent="-228600" algn="l" defTabSz="914400" rtl="0" eaLnBrk="1" latinLnBrk="0" hangingPunct="1">
+              <a:lnSpc>
+                <a:spcPct val="90000"/>
+              </a:lnSpc>
+              <a:spcBef>
+                <a:spcPts val="500"/>
+              </a:spcBef>
+              <a:buClr>
+                <a:srgbClr val="235EE2"/>
+              </a:buClr>
+              <a:buSzPct val="70000"/>
+              <a:buFont typeface="Arial" panose="020B0604020202020204" pitchFamily="34" charset="0"/>
+              <a:buChar char="•"/>
+              <a:defRPr sz="1600" kern="1200" baseline="0">
+                <a:solidFill>
+                  <a:schemeClr val="tx1">
+                    <a:lumMod val="65000"/>
+                    <a:lumOff val="35000"/>
+                  </a:schemeClr>
+                </a:solidFill>
+                <a:latin typeface="Helvetica Light"/>
+                <a:ea typeface="+mn-ea"/>
+                <a:cs typeface="Helvetica Light"/>
+              </a:defRPr>
+            </a:lvl2pPr>
+            <a:lvl3pPr marL="1143000" indent="-228600" algn="l" defTabSz="914400" rtl="0" eaLnBrk="1" latinLnBrk="0" hangingPunct="1">
+              <a:lnSpc>
+                <a:spcPct val="90000"/>
+              </a:lnSpc>
+              <a:spcBef>
+                <a:spcPts val="500"/>
+              </a:spcBef>
+              <a:buFont typeface="Arial" panose="020B0604020202020204" pitchFamily="34" charset="0"/>
+              <a:buChar char="•"/>
+              <a:defRPr sz="2000" kern="1200">
+                <a:solidFill>
+                  <a:schemeClr val="tx1"/>
+                </a:solidFill>
+                <a:latin typeface="Avenir Heavy"/>
+                <a:ea typeface="+mn-ea"/>
+                <a:cs typeface="Avenir Heavy"/>
+              </a:defRPr>
+            </a:lvl3pPr>
+            <a:lvl4pPr marL="1600200" indent="-228600" algn="l" defTabSz="914400" rtl="0" eaLnBrk="1" latinLnBrk="0" hangingPunct="1">
+              <a:lnSpc>
+                <a:spcPct val="90000"/>
+              </a:lnSpc>
+              <a:spcBef>
+                <a:spcPts val="500"/>
+              </a:spcBef>
+              <a:buFont typeface="Arial" panose="020B0604020202020204" pitchFamily="34" charset="0"/>
+              <a:buChar char="•"/>
+              <a:defRPr sz="1800" kern="1200">
+                <a:solidFill>
+                  <a:schemeClr val="tx1"/>
+                </a:solidFill>
+                <a:latin typeface="Avenir Heavy"/>
+                <a:ea typeface="+mn-ea"/>
+                <a:cs typeface="Avenir Heavy"/>
+              </a:defRPr>
+            </a:lvl4pPr>
+            <a:lvl5pPr marL="2057400" indent="-228600" algn="l" defTabSz="914400" rtl="0" eaLnBrk="1" latinLnBrk="0" hangingPunct="1">
+              <a:lnSpc>
+                <a:spcPct val="90000"/>
+              </a:lnSpc>
+              <a:spcBef>
+                <a:spcPts val="500"/>
+              </a:spcBef>
+              <a:buFont typeface="Arial" panose="020B0604020202020204" pitchFamily="34" charset="0"/>
+              <a:buChar char="•"/>
+              <a:defRPr sz="1800" kern="1200">
+                <a:solidFill>
+                  <a:schemeClr val="tx1"/>
+                </a:solidFill>
+                <a:latin typeface="Avenir Heavy"/>
+                <a:ea typeface="+mn-ea"/>
+                <a:cs typeface="Avenir Heavy"/>
+              </a:defRPr>
+            </a:lvl5pPr>
+            <a:lvl6pPr marL="2514600" indent="-228600" algn="l" defTabSz="914400" rtl="0" eaLnBrk="1" latinLnBrk="0" hangingPunct="1">
+              <a:lnSpc>
+                <a:spcPct val="90000"/>
+              </a:lnSpc>
+              <a:spcBef>
+                <a:spcPts val="500"/>
+              </a:spcBef>
+              <a:buFont typeface="Arial" panose="020B0604020202020204" pitchFamily="34" charset="0"/>
+              <a:buChar char="•"/>
+              <a:defRPr sz="1800" kern="1200">
+                <a:solidFill>
+                  <a:schemeClr val="tx1"/>
+                </a:solidFill>
+                <a:latin typeface="+mn-lt"/>
+                <a:ea typeface="+mn-ea"/>
+                <a:cs typeface="+mn-cs"/>
+              </a:defRPr>
+            </a:lvl6pPr>
+            <a:lvl7pPr marL="2971800" indent="-228600" algn="l" defTabSz="914400" rtl="0" eaLnBrk="1" latinLnBrk="0" hangingPunct="1">
+              <a:lnSpc>
+                <a:spcPct val="90000"/>
+              </a:lnSpc>
+              <a:spcBef>
+                <a:spcPts val="500"/>
+              </a:spcBef>
+              <a:buFont typeface="Arial" panose="020B0604020202020204" pitchFamily="34" charset="0"/>
+              <a:buChar char="•"/>
+              <a:defRPr sz="1800" kern="1200">
+                <a:solidFill>
+                  <a:schemeClr val="tx1"/>
+                </a:solidFill>
+                <a:latin typeface="+mn-lt"/>
+                <a:ea typeface="+mn-ea"/>
+                <a:cs typeface="+mn-cs"/>
+              </a:defRPr>
+            </a:lvl7pPr>
+            <a:lvl8pPr marL="3429000" indent="-228600" algn="l" defTabSz="914400" rtl="0" eaLnBrk="1" latinLnBrk="0" hangingPunct="1">
+              <a:lnSpc>
+                <a:spcPct val="90000"/>
+              </a:lnSpc>
+              <a:spcBef>
+                <a:spcPts val="500"/>
+              </a:spcBef>
+              <a:buFont typeface="Arial" panose="020B0604020202020204" pitchFamily="34" charset="0"/>
+              <a:buChar char="•"/>
+              <a:defRPr sz="1800" kern="1200">
+                <a:solidFill>
+                  <a:schemeClr val="tx1"/>
+                </a:solidFill>
+                <a:latin typeface="+mn-lt"/>
+                <a:ea typeface="+mn-ea"/>
+                <a:cs typeface="+mn-cs"/>
+              </a:defRPr>
+            </a:lvl8pPr>
+            <a:lvl9pPr marL="3886200" indent="-228600" algn="l" defTabSz="914400" rtl="0" eaLnBrk="1" latinLnBrk="0" hangingPunct="1">
+              <a:lnSpc>
+                <a:spcPct val="90000"/>
+              </a:lnSpc>
+              <a:spcBef>
+                <a:spcPts val="500"/>
+              </a:spcBef>
+              <a:buFont typeface="Arial" panose="020B0604020202020204" pitchFamily="34" charset="0"/>
+              <a:buChar char="•"/>
+              <a:defRPr sz="1800" kern="1200">
+                <a:solidFill>
+                  <a:schemeClr val="tx1"/>
+                </a:solidFill>
+                <a:latin typeface="+mn-lt"/>
+                <a:ea typeface="+mn-ea"/>
+                <a:cs typeface="+mn-cs"/>
+              </a:defRPr>
+            </a:lvl9pPr>
+          </a:lstStyle>
+          <a:p>
+            <a:pPr marL="0" indent="0">
+              <a:buNone/>
+            </a:pPr>
             <a:r>
               <a:rPr lang="en-US" dirty="0"/>
-              <a:t>Mozilla Public</a:t>
+              <a:t>Non-permissive (copy-left)</a:t>
+            </a:r>
+          </a:p>
+        </p:txBody>
+      </p:sp>
+      <p:sp>
+        <p:nvSpPr>
+          <p:cNvPr id="21" name="Text Placeholder 3">
+            <a:extLst>
+              <a:ext uri="{FF2B5EF4-FFF2-40B4-BE49-F238E27FC236}">
+                <a16:creationId xmlns:a16="http://schemas.microsoft.com/office/drawing/2014/main" id="{31604E53-7CE3-303D-67E5-9D180577F926}"/>
+              </a:ext>
+            </a:extLst>
+          </p:cNvPr>
+          <p:cNvSpPr txBox="1">
+            <a:spLocks/>
+          </p:cNvSpPr>
+          <p:nvPr/>
+        </p:nvSpPr>
+        <p:spPr>
+          <a:xfrm>
+            <a:off x="6285401" y="4652678"/>
+            <a:ext cx="3197265" cy="554510"/>
+          </a:xfrm>
+          <a:prstGeom prst="rect">
+            <a:avLst/>
+          </a:prstGeom>
+        </p:spPr>
+        <p:txBody>
+          <a:bodyPr vert="horz" lIns="91440" tIns="45720" rIns="91440" bIns="45720" rtlCol="0">
+            <a:normAutofit/>
+          </a:bodyPr>
+          <a:lstStyle>
+            <a:lvl1pPr marL="380990" indent="-380990" algn="l" defTabSz="914400" rtl="0" eaLnBrk="1" latinLnBrk="0" hangingPunct="1">
+              <a:lnSpc>
+                <a:spcPct val="90000"/>
+              </a:lnSpc>
+              <a:spcBef>
+                <a:spcPts val="1000"/>
+              </a:spcBef>
+              <a:buClr>
+                <a:srgbClr val="235EE2"/>
+              </a:buClr>
+              <a:buSzPct val="70000"/>
+              <a:buFont typeface="Courier New"/>
+              <a:buChar char="o"/>
+              <a:defRPr sz="1867" b="0" i="0" kern="1200" baseline="0">
+                <a:solidFill>
+                  <a:schemeClr val="tx1">
+                    <a:lumMod val="75000"/>
+                    <a:lumOff val="25000"/>
+                  </a:schemeClr>
+                </a:solidFill>
+                <a:latin typeface="Aptos" panose="020B0004020202020204" pitchFamily="34" charset="0"/>
+                <a:ea typeface="+mn-ea"/>
+                <a:cs typeface="Aptos" panose="020B0004020202020204" pitchFamily="34" charset="0"/>
+              </a:defRPr>
+            </a:lvl1pPr>
+            <a:lvl2pPr marL="685800" indent="-228600" algn="l" defTabSz="914400" rtl="0" eaLnBrk="1" latinLnBrk="0" hangingPunct="1">
+              <a:lnSpc>
+                <a:spcPct val="90000"/>
+              </a:lnSpc>
+              <a:spcBef>
+                <a:spcPts val="500"/>
+              </a:spcBef>
+              <a:buClr>
+                <a:srgbClr val="235EE2"/>
+              </a:buClr>
+              <a:buSzPct val="70000"/>
+              <a:buFont typeface="Arial" panose="020B0604020202020204" pitchFamily="34" charset="0"/>
+              <a:buChar char="•"/>
+              <a:defRPr sz="1600" kern="1200" baseline="0">
+                <a:solidFill>
+                  <a:schemeClr val="tx1">
+                    <a:lumMod val="65000"/>
+                    <a:lumOff val="35000"/>
+                  </a:schemeClr>
+                </a:solidFill>
+                <a:latin typeface="Helvetica Light"/>
+                <a:ea typeface="+mn-ea"/>
+                <a:cs typeface="Helvetica Light"/>
+              </a:defRPr>
+            </a:lvl2pPr>
+            <a:lvl3pPr marL="1143000" indent="-228600" algn="l" defTabSz="914400" rtl="0" eaLnBrk="1" latinLnBrk="0" hangingPunct="1">
+              <a:lnSpc>
+                <a:spcPct val="90000"/>
+              </a:lnSpc>
+              <a:spcBef>
+                <a:spcPts val="500"/>
+              </a:spcBef>
+              <a:buFont typeface="Arial" panose="020B0604020202020204" pitchFamily="34" charset="0"/>
+              <a:buChar char="•"/>
+              <a:defRPr sz="2000" kern="1200">
+                <a:solidFill>
+                  <a:schemeClr val="tx1"/>
+                </a:solidFill>
+                <a:latin typeface="Avenir Heavy"/>
+                <a:ea typeface="+mn-ea"/>
+                <a:cs typeface="Avenir Heavy"/>
+              </a:defRPr>
+            </a:lvl3pPr>
+            <a:lvl4pPr marL="1600200" indent="-228600" algn="l" defTabSz="914400" rtl="0" eaLnBrk="1" latinLnBrk="0" hangingPunct="1">
+              <a:lnSpc>
+                <a:spcPct val="90000"/>
+              </a:lnSpc>
+              <a:spcBef>
+                <a:spcPts val="500"/>
+              </a:spcBef>
+              <a:buFont typeface="Arial" panose="020B0604020202020204" pitchFamily="34" charset="0"/>
+              <a:buChar char="•"/>
+              <a:defRPr sz="1800" kern="1200">
+                <a:solidFill>
+                  <a:schemeClr val="tx1"/>
+                </a:solidFill>
+                <a:latin typeface="Avenir Heavy"/>
+                <a:ea typeface="+mn-ea"/>
+                <a:cs typeface="Avenir Heavy"/>
+              </a:defRPr>
+            </a:lvl4pPr>
+            <a:lvl5pPr marL="2057400" indent="-228600" algn="l" defTabSz="914400" rtl="0" eaLnBrk="1" latinLnBrk="0" hangingPunct="1">
+              <a:lnSpc>
+                <a:spcPct val="90000"/>
+              </a:lnSpc>
+              <a:spcBef>
+                <a:spcPts val="500"/>
+              </a:spcBef>
+              <a:buFont typeface="Arial" panose="020B0604020202020204" pitchFamily="34" charset="0"/>
+              <a:buChar char="•"/>
+              <a:defRPr sz="1800" kern="1200">
+                <a:solidFill>
+                  <a:schemeClr val="tx1"/>
+                </a:solidFill>
+                <a:latin typeface="Avenir Heavy"/>
+                <a:ea typeface="+mn-ea"/>
+                <a:cs typeface="Avenir Heavy"/>
+              </a:defRPr>
+            </a:lvl5pPr>
+            <a:lvl6pPr marL="2514600" indent="-228600" algn="l" defTabSz="914400" rtl="0" eaLnBrk="1" latinLnBrk="0" hangingPunct="1">
+              <a:lnSpc>
+                <a:spcPct val="90000"/>
+              </a:lnSpc>
+              <a:spcBef>
+                <a:spcPts val="500"/>
+              </a:spcBef>
+              <a:buFont typeface="Arial" panose="020B0604020202020204" pitchFamily="34" charset="0"/>
+              <a:buChar char="•"/>
+              <a:defRPr sz="1800" kern="1200">
+                <a:solidFill>
+                  <a:schemeClr val="tx1"/>
+                </a:solidFill>
+                <a:latin typeface="+mn-lt"/>
+                <a:ea typeface="+mn-ea"/>
+                <a:cs typeface="+mn-cs"/>
+              </a:defRPr>
+            </a:lvl6pPr>
+            <a:lvl7pPr marL="2971800" indent="-228600" algn="l" defTabSz="914400" rtl="0" eaLnBrk="1" latinLnBrk="0" hangingPunct="1">
+              <a:lnSpc>
+                <a:spcPct val="90000"/>
+              </a:lnSpc>
+              <a:spcBef>
+                <a:spcPts val="500"/>
+              </a:spcBef>
+              <a:buFont typeface="Arial" panose="020B0604020202020204" pitchFamily="34" charset="0"/>
+              <a:buChar char="•"/>
+              <a:defRPr sz="1800" kern="1200">
+                <a:solidFill>
+                  <a:schemeClr val="tx1"/>
+                </a:solidFill>
+                <a:latin typeface="+mn-lt"/>
+                <a:ea typeface="+mn-ea"/>
+                <a:cs typeface="+mn-cs"/>
+              </a:defRPr>
+            </a:lvl7pPr>
+            <a:lvl8pPr marL="3429000" indent="-228600" algn="l" defTabSz="914400" rtl="0" eaLnBrk="1" latinLnBrk="0" hangingPunct="1">
+              <a:lnSpc>
+                <a:spcPct val="90000"/>
+              </a:lnSpc>
+              <a:spcBef>
+                <a:spcPts val="500"/>
+              </a:spcBef>
+              <a:buFont typeface="Arial" panose="020B0604020202020204" pitchFamily="34" charset="0"/>
+              <a:buChar char="•"/>
+              <a:defRPr sz="1800" kern="1200">
+                <a:solidFill>
+                  <a:schemeClr val="tx1"/>
+                </a:solidFill>
+                <a:latin typeface="+mn-lt"/>
+                <a:ea typeface="+mn-ea"/>
+                <a:cs typeface="+mn-cs"/>
+              </a:defRPr>
+            </a:lvl8pPr>
+            <a:lvl9pPr marL="3886200" indent="-228600" algn="l" defTabSz="914400" rtl="0" eaLnBrk="1" latinLnBrk="0" hangingPunct="1">
+              <a:lnSpc>
+                <a:spcPct val="90000"/>
+              </a:lnSpc>
+              <a:spcBef>
+                <a:spcPts val="500"/>
+              </a:spcBef>
+              <a:buFont typeface="Arial" panose="020B0604020202020204" pitchFamily="34" charset="0"/>
+              <a:buChar char="•"/>
+              <a:defRPr sz="1800" kern="1200">
+                <a:solidFill>
+                  <a:schemeClr val="tx1"/>
+                </a:solidFill>
+                <a:latin typeface="+mn-lt"/>
+                <a:ea typeface="+mn-ea"/>
+                <a:cs typeface="+mn-cs"/>
+              </a:defRPr>
+            </a:lvl9pPr>
+          </a:lstStyle>
+          <a:p>
+            <a:pPr marL="0" indent="0">
+              <a:buNone/>
+            </a:pPr>
+            <a:r>
+              <a:rPr lang="en-US" sz="1700" b="1" dirty="0"/>
+              <a:t>GNU General Public License</a:t>
+            </a:r>
+          </a:p>
+        </p:txBody>
+      </p:sp>
+      <p:sp>
+        <p:nvSpPr>
+          <p:cNvPr id="24" name="Text Placeholder 3">
+            <a:extLst>
+              <a:ext uri="{FF2B5EF4-FFF2-40B4-BE49-F238E27FC236}">
+                <a16:creationId xmlns:a16="http://schemas.microsoft.com/office/drawing/2014/main" id="{70A58676-812F-A1DB-9D04-30BE2AA75DF2}"/>
+              </a:ext>
+            </a:extLst>
+          </p:cNvPr>
+          <p:cNvSpPr txBox="1">
+            <a:spLocks/>
+          </p:cNvSpPr>
+          <p:nvPr/>
+        </p:nvSpPr>
+        <p:spPr>
+          <a:xfrm>
+            <a:off x="2090991" y="2327385"/>
+            <a:ext cx="2993616" cy="554510"/>
+          </a:xfrm>
+          <a:prstGeom prst="rect">
+            <a:avLst/>
+          </a:prstGeom>
+        </p:spPr>
+        <p:txBody>
+          <a:bodyPr vert="horz" lIns="91440" tIns="45720" rIns="91440" bIns="45720" rtlCol="0">
+            <a:noAutofit/>
+          </a:bodyPr>
+          <a:lstStyle>
+            <a:lvl1pPr marL="380990" indent="-380990" algn="l" defTabSz="914400" rtl="0" eaLnBrk="1" latinLnBrk="0" hangingPunct="1">
+              <a:lnSpc>
+                <a:spcPct val="90000"/>
+              </a:lnSpc>
+              <a:spcBef>
+                <a:spcPts val="1000"/>
+              </a:spcBef>
+              <a:buClr>
+                <a:srgbClr val="235EE2"/>
+              </a:buClr>
+              <a:buSzPct val="70000"/>
+              <a:buFont typeface="Courier New"/>
+              <a:buChar char="o"/>
+              <a:defRPr sz="1867" b="0" i="0" kern="1200" baseline="0">
+                <a:solidFill>
+                  <a:schemeClr val="tx1">
+                    <a:lumMod val="75000"/>
+                    <a:lumOff val="25000"/>
+                  </a:schemeClr>
+                </a:solidFill>
+                <a:latin typeface="Aptos" panose="020B0004020202020204" pitchFamily="34" charset="0"/>
+                <a:ea typeface="+mn-ea"/>
+                <a:cs typeface="Aptos" panose="020B0004020202020204" pitchFamily="34" charset="0"/>
+              </a:defRPr>
+            </a:lvl1pPr>
+            <a:lvl2pPr marL="685800" indent="-228600" algn="l" defTabSz="914400" rtl="0" eaLnBrk="1" latinLnBrk="0" hangingPunct="1">
+              <a:lnSpc>
+                <a:spcPct val="90000"/>
+              </a:lnSpc>
+              <a:spcBef>
+                <a:spcPts val="500"/>
+              </a:spcBef>
+              <a:buClr>
+                <a:srgbClr val="235EE2"/>
+              </a:buClr>
+              <a:buSzPct val="70000"/>
+              <a:buFont typeface="Arial" panose="020B0604020202020204" pitchFamily="34" charset="0"/>
+              <a:buChar char="•"/>
+              <a:defRPr sz="1600" kern="1200" baseline="0">
+                <a:solidFill>
+                  <a:schemeClr val="tx1">
+                    <a:lumMod val="65000"/>
+                    <a:lumOff val="35000"/>
+                  </a:schemeClr>
+                </a:solidFill>
+                <a:latin typeface="Helvetica Light"/>
+                <a:ea typeface="+mn-ea"/>
+                <a:cs typeface="Helvetica Light"/>
+              </a:defRPr>
+            </a:lvl2pPr>
+            <a:lvl3pPr marL="1143000" indent="-228600" algn="l" defTabSz="914400" rtl="0" eaLnBrk="1" latinLnBrk="0" hangingPunct="1">
+              <a:lnSpc>
+                <a:spcPct val="90000"/>
+              </a:lnSpc>
+              <a:spcBef>
+                <a:spcPts val="500"/>
+              </a:spcBef>
+              <a:buFont typeface="Arial" panose="020B0604020202020204" pitchFamily="34" charset="0"/>
+              <a:buChar char="•"/>
+              <a:defRPr sz="2000" kern="1200">
+                <a:solidFill>
+                  <a:schemeClr val="tx1"/>
+                </a:solidFill>
+                <a:latin typeface="Avenir Heavy"/>
+                <a:ea typeface="+mn-ea"/>
+                <a:cs typeface="Avenir Heavy"/>
+              </a:defRPr>
+            </a:lvl3pPr>
+            <a:lvl4pPr marL="1600200" indent="-228600" algn="l" defTabSz="914400" rtl="0" eaLnBrk="1" latinLnBrk="0" hangingPunct="1">
+              <a:lnSpc>
+                <a:spcPct val="90000"/>
+              </a:lnSpc>
+              <a:spcBef>
+                <a:spcPts val="500"/>
+              </a:spcBef>
+              <a:buFont typeface="Arial" panose="020B0604020202020204" pitchFamily="34" charset="0"/>
+              <a:buChar char="•"/>
+              <a:defRPr sz="1800" kern="1200">
+                <a:solidFill>
+                  <a:schemeClr val="tx1"/>
+                </a:solidFill>
+                <a:latin typeface="Avenir Heavy"/>
+                <a:ea typeface="+mn-ea"/>
+                <a:cs typeface="Avenir Heavy"/>
+              </a:defRPr>
+            </a:lvl4pPr>
+            <a:lvl5pPr marL="2057400" indent="-228600" algn="l" defTabSz="914400" rtl="0" eaLnBrk="1" latinLnBrk="0" hangingPunct="1">
+              <a:lnSpc>
+                <a:spcPct val="90000"/>
+              </a:lnSpc>
+              <a:spcBef>
+                <a:spcPts val="500"/>
+              </a:spcBef>
+              <a:buFont typeface="Arial" panose="020B0604020202020204" pitchFamily="34" charset="0"/>
+              <a:buChar char="•"/>
+              <a:defRPr sz="1800" kern="1200">
+                <a:solidFill>
+                  <a:schemeClr val="tx1"/>
+                </a:solidFill>
+                <a:latin typeface="Avenir Heavy"/>
+                <a:ea typeface="+mn-ea"/>
+                <a:cs typeface="Avenir Heavy"/>
+              </a:defRPr>
+            </a:lvl5pPr>
+            <a:lvl6pPr marL="2514600" indent="-228600" algn="l" defTabSz="914400" rtl="0" eaLnBrk="1" latinLnBrk="0" hangingPunct="1">
+              <a:lnSpc>
+                <a:spcPct val="90000"/>
+              </a:lnSpc>
+              <a:spcBef>
+                <a:spcPts val="500"/>
+              </a:spcBef>
+              <a:buFont typeface="Arial" panose="020B0604020202020204" pitchFamily="34" charset="0"/>
+              <a:buChar char="•"/>
+              <a:defRPr sz="1800" kern="1200">
+                <a:solidFill>
+                  <a:schemeClr val="tx1"/>
+                </a:solidFill>
+                <a:latin typeface="+mn-lt"/>
+                <a:ea typeface="+mn-ea"/>
+                <a:cs typeface="+mn-cs"/>
+              </a:defRPr>
+            </a:lvl6pPr>
+            <a:lvl7pPr marL="2971800" indent="-228600" algn="l" defTabSz="914400" rtl="0" eaLnBrk="1" latinLnBrk="0" hangingPunct="1">
+              <a:lnSpc>
+                <a:spcPct val="90000"/>
+              </a:lnSpc>
+              <a:spcBef>
+                <a:spcPts val="500"/>
+              </a:spcBef>
+              <a:buFont typeface="Arial" panose="020B0604020202020204" pitchFamily="34" charset="0"/>
+              <a:buChar char="•"/>
+              <a:defRPr sz="1800" kern="1200">
+                <a:solidFill>
+                  <a:schemeClr val="tx1"/>
+                </a:solidFill>
+                <a:latin typeface="+mn-lt"/>
+                <a:ea typeface="+mn-ea"/>
+                <a:cs typeface="+mn-cs"/>
+              </a:defRPr>
+            </a:lvl7pPr>
+            <a:lvl8pPr marL="3429000" indent="-228600" algn="l" defTabSz="914400" rtl="0" eaLnBrk="1" latinLnBrk="0" hangingPunct="1">
+              <a:lnSpc>
+                <a:spcPct val="90000"/>
+              </a:lnSpc>
+              <a:spcBef>
+                <a:spcPts val="500"/>
+              </a:spcBef>
+              <a:buFont typeface="Arial" panose="020B0604020202020204" pitchFamily="34" charset="0"/>
+              <a:buChar char="•"/>
+              <a:defRPr sz="1800" kern="1200">
+                <a:solidFill>
+                  <a:schemeClr val="tx1"/>
+                </a:solidFill>
+                <a:latin typeface="+mn-lt"/>
+                <a:ea typeface="+mn-ea"/>
+                <a:cs typeface="+mn-cs"/>
+              </a:defRPr>
+            </a:lvl8pPr>
+            <a:lvl9pPr marL="3886200" indent="-228600" algn="l" defTabSz="914400" rtl="0" eaLnBrk="1" latinLnBrk="0" hangingPunct="1">
+              <a:lnSpc>
+                <a:spcPct val="90000"/>
+              </a:lnSpc>
+              <a:spcBef>
+                <a:spcPts val="500"/>
+              </a:spcBef>
+              <a:buFont typeface="Arial" panose="020B0604020202020204" pitchFamily="34" charset="0"/>
+              <a:buChar char="•"/>
+              <a:defRPr sz="1800" kern="1200">
+                <a:solidFill>
+                  <a:schemeClr val="tx1"/>
+                </a:solidFill>
+                <a:latin typeface="+mn-lt"/>
+                <a:ea typeface="+mn-ea"/>
+                <a:cs typeface="+mn-cs"/>
+              </a:defRPr>
+            </a:lvl9pPr>
+          </a:lstStyle>
+          <a:p>
+            <a:pPr marL="0" indent="0" algn="ctr">
+              <a:buNone/>
+            </a:pPr>
+            <a:r>
+              <a:rPr lang="en-US" sz="1700" b="1" dirty="0"/>
+              <a:t>Creative Commons Attribution Non Commercial</a:t>
+            </a:r>
+          </a:p>
+        </p:txBody>
+      </p:sp>
+      <p:sp>
+        <p:nvSpPr>
+          <p:cNvPr id="25" name="Text Placeholder 3">
+            <a:extLst>
+              <a:ext uri="{FF2B5EF4-FFF2-40B4-BE49-F238E27FC236}">
+                <a16:creationId xmlns:a16="http://schemas.microsoft.com/office/drawing/2014/main" id="{526EDD86-93FD-7FE2-BEED-5DD85A46F9CA}"/>
+              </a:ext>
+            </a:extLst>
+          </p:cNvPr>
+          <p:cNvSpPr txBox="1">
+            <a:spLocks/>
+          </p:cNvSpPr>
+          <p:nvPr/>
+        </p:nvSpPr>
+        <p:spPr>
+          <a:xfrm>
+            <a:off x="6650568" y="3065137"/>
+            <a:ext cx="1592179" cy="495952"/>
+          </a:xfrm>
+          <a:prstGeom prst="rect">
+            <a:avLst/>
+          </a:prstGeom>
+        </p:spPr>
+        <p:txBody>
+          <a:bodyPr vert="horz" lIns="91440" tIns="45720" rIns="91440" bIns="45720" rtlCol="0">
+            <a:normAutofit/>
+          </a:bodyPr>
+          <a:lstStyle>
+            <a:lvl1pPr marL="380990" indent="-380990" algn="l" defTabSz="914400" rtl="0" eaLnBrk="1" latinLnBrk="0" hangingPunct="1">
+              <a:lnSpc>
+                <a:spcPct val="90000"/>
+              </a:lnSpc>
+              <a:spcBef>
+                <a:spcPts val="1000"/>
+              </a:spcBef>
+              <a:buClr>
+                <a:srgbClr val="235EE2"/>
+              </a:buClr>
+              <a:buSzPct val="70000"/>
+              <a:buFont typeface="Courier New"/>
+              <a:buChar char="o"/>
+              <a:defRPr sz="1867" b="0" i="0" kern="1200" baseline="0">
+                <a:solidFill>
+                  <a:schemeClr val="tx1">
+                    <a:lumMod val="75000"/>
+                    <a:lumOff val="25000"/>
+                  </a:schemeClr>
+                </a:solidFill>
+                <a:latin typeface="Aptos" panose="020B0004020202020204" pitchFamily="34" charset="0"/>
+                <a:ea typeface="+mn-ea"/>
+                <a:cs typeface="Aptos" panose="020B0004020202020204" pitchFamily="34" charset="0"/>
+              </a:defRPr>
+            </a:lvl1pPr>
+            <a:lvl2pPr marL="685800" indent="-228600" algn="l" defTabSz="914400" rtl="0" eaLnBrk="1" latinLnBrk="0" hangingPunct="1">
+              <a:lnSpc>
+                <a:spcPct val="90000"/>
+              </a:lnSpc>
+              <a:spcBef>
+                <a:spcPts val="500"/>
+              </a:spcBef>
+              <a:buClr>
+                <a:srgbClr val="235EE2"/>
+              </a:buClr>
+              <a:buSzPct val="70000"/>
+              <a:buFont typeface="Arial" panose="020B0604020202020204" pitchFamily="34" charset="0"/>
+              <a:buChar char="•"/>
+              <a:defRPr sz="1600" kern="1200" baseline="0">
+                <a:solidFill>
+                  <a:schemeClr val="tx1">
+                    <a:lumMod val="65000"/>
+                    <a:lumOff val="35000"/>
+                  </a:schemeClr>
+                </a:solidFill>
+                <a:latin typeface="Helvetica Light"/>
+                <a:ea typeface="+mn-ea"/>
+                <a:cs typeface="Helvetica Light"/>
+              </a:defRPr>
+            </a:lvl2pPr>
+            <a:lvl3pPr marL="1143000" indent="-228600" algn="l" defTabSz="914400" rtl="0" eaLnBrk="1" latinLnBrk="0" hangingPunct="1">
+              <a:lnSpc>
+                <a:spcPct val="90000"/>
+              </a:lnSpc>
+              <a:spcBef>
+                <a:spcPts val="500"/>
+              </a:spcBef>
+              <a:buFont typeface="Arial" panose="020B0604020202020204" pitchFamily="34" charset="0"/>
+              <a:buChar char="•"/>
+              <a:defRPr sz="2000" kern="1200">
+                <a:solidFill>
+                  <a:schemeClr val="tx1"/>
+                </a:solidFill>
+                <a:latin typeface="Avenir Heavy"/>
+                <a:ea typeface="+mn-ea"/>
+                <a:cs typeface="Avenir Heavy"/>
+              </a:defRPr>
+            </a:lvl3pPr>
+            <a:lvl4pPr marL="1600200" indent="-228600" algn="l" defTabSz="914400" rtl="0" eaLnBrk="1" latinLnBrk="0" hangingPunct="1">
+              <a:lnSpc>
+                <a:spcPct val="90000"/>
+              </a:lnSpc>
+              <a:spcBef>
+                <a:spcPts val="500"/>
+              </a:spcBef>
+              <a:buFont typeface="Arial" panose="020B0604020202020204" pitchFamily="34" charset="0"/>
+              <a:buChar char="•"/>
+              <a:defRPr sz="1800" kern="1200">
+                <a:solidFill>
+                  <a:schemeClr val="tx1"/>
+                </a:solidFill>
+                <a:latin typeface="Avenir Heavy"/>
+                <a:ea typeface="+mn-ea"/>
+                <a:cs typeface="Avenir Heavy"/>
+              </a:defRPr>
+            </a:lvl4pPr>
+            <a:lvl5pPr marL="2057400" indent="-228600" algn="l" defTabSz="914400" rtl="0" eaLnBrk="1" latinLnBrk="0" hangingPunct="1">
+              <a:lnSpc>
+                <a:spcPct val="90000"/>
+              </a:lnSpc>
+              <a:spcBef>
+                <a:spcPts val="500"/>
+              </a:spcBef>
+              <a:buFont typeface="Arial" panose="020B0604020202020204" pitchFamily="34" charset="0"/>
+              <a:buChar char="•"/>
+              <a:defRPr sz="1800" kern="1200">
+                <a:solidFill>
+                  <a:schemeClr val="tx1"/>
+                </a:solidFill>
+                <a:latin typeface="Avenir Heavy"/>
+                <a:ea typeface="+mn-ea"/>
+                <a:cs typeface="Avenir Heavy"/>
+              </a:defRPr>
+            </a:lvl5pPr>
+            <a:lvl6pPr marL="2514600" indent="-228600" algn="l" defTabSz="914400" rtl="0" eaLnBrk="1" latinLnBrk="0" hangingPunct="1">
+              <a:lnSpc>
+                <a:spcPct val="90000"/>
+              </a:lnSpc>
+              <a:spcBef>
+                <a:spcPts val="500"/>
+              </a:spcBef>
+              <a:buFont typeface="Arial" panose="020B0604020202020204" pitchFamily="34" charset="0"/>
+              <a:buChar char="•"/>
+              <a:defRPr sz="1800" kern="1200">
+                <a:solidFill>
+                  <a:schemeClr val="tx1"/>
+                </a:solidFill>
+                <a:latin typeface="+mn-lt"/>
+                <a:ea typeface="+mn-ea"/>
+                <a:cs typeface="+mn-cs"/>
+              </a:defRPr>
+            </a:lvl6pPr>
+            <a:lvl7pPr marL="2971800" indent="-228600" algn="l" defTabSz="914400" rtl="0" eaLnBrk="1" latinLnBrk="0" hangingPunct="1">
+              <a:lnSpc>
+                <a:spcPct val="90000"/>
+              </a:lnSpc>
+              <a:spcBef>
+                <a:spcPts val="500"/>
+              </a:spcBef>
+              <a:buFont typeface="Arial" panose="020B0604020202020204" pitchFamily="34" charset="0"/>
+              <a:buChar char="•"/>
+              <a:defRPr sz="1800" kern="1200">
+                <a:solidFill>
+                  <a:schemeClr val="tx1"/>
+                </a:solidFill>
+                <a:latin typeface="+mn-lt"/>
+                <a:ea typeface="+mn-ea"/>
+                <a:cs typeface="+mn-cs"/>
+              </a:defRPr>
+            </a:lvl7pPr>
+            <a:lvl8pPr marL="3429000" indent="-228600" algn="l" defTabSz="914400" rtl="0" eaLnBrk="1" latinLnBrk="0" hangingPunct="1">
+              <a:lnSpc>
+                <a:spcPct val="90000"/>
+              </a:lnSpc>
+              <a:spcBef>
+                <a:spcPts val="500"/>
+              </a:spcBef>
+              <a:buFont typeface="Arial" panose="020B0604020202020204" pitchFamily="34" charset="0"/>
+              <a:buChar char="•"/>
+              <a:defRPr sz="1800" kern="1200">
+                <a:solidFill>
+                  <a:schemeClr val="tx1"/>
+                </a:solidFill>
+                <a:latin typeface="+mn-lt"/>
+                <a:ea typeface="+mn-ea"/>
+                <a:cs typeface="+mn-cs"/>
+              </a:defRPr>
+            </a:lvl8pPr>
+            <a:lvl9pPr marL="3886200" indent="-228600" algn="l" defTabSz="914400" rtl="0" eaLnBrk="1" latinLnBrk="0" hangingPunct="1">
+              <a:lnSpc>
+                <a:spcPct val="90000"/>
+              </a:lnSpc>
+              <a:spcBef>
+                <a:spcPts val="500"/>
+              </a:spcBef>
+              <a:buFont typeface="Arial" panose="020B0604020202020204" pitchFamily="34" charset="0"/>
+              <a:buChar char="•"/>
+              <a:defRPr sz="1800" kern="1200">
+                <a:solidFill>
+                  <a:schemeClr val="tx1"/>
+                </a:solidFill>
+                <a:latin typeface="+mn-lt"/>
+                <a:ea typeface="+mn-ea"/>
+                <a:cs typeface="+mn-cs"/>
+              </a:defRPr>
+            </a:lvl9pPr>
+          </a:lstStyle>
+          <a:p>
+            <a:pPr marL="0" indent="0">
+              <a:buNone/>
+            </a:pPr>
+            <a:r>
+              <a:rPr lang="en-US" i="1" dirty="0"/>
+              <a:t>e.g. </a:t>
+            </a:r>
+            <a:r>
+              <a:rPr lang="en-US" i="1" dirty="0" err="1"/>
+              <a:t>PyTorch</a:t>
+            </a:r>
+            <a:r>
+              <a:rPr lang="en-US" i="1" dirty="0"/>
+              <a:t> </a:t>
+            </a:r>
+          </a:p>
+        </p:txBody>
+      </p:sp>
+      <p:sp>
+        <p:nvSpPr>
+          <p:cNvPr id="26" name="Text Placeholder 3">
+            <a:extLst>
+              <a:ext uri="{FF2B5EF4-FFF2-40B4-BE49-F238E27FC236}">
+                <a16:creationId xmlns:a16="http://schemas.microsoft.com/office/drawing/2014/main" id="{1030D4B1-D0D0-8F3C-3B97-CFC461F298FE}"/>
+              </a:ext>
+            </a:extLst>
+          </p:cNvPr>
+          <p:cNvSpPr txBox="1">
+            <a:spLocks/>
+          </p:cNvSpPr>
+          <p:nvPr/>
+        </p:nvSpPr>
+        <p:spPr>
+          <a:xfrm>
+            <a:off x="6650568" y="5044979"/>
+            <a:ext cx="2137326" cy="495952"/>
+          </a:xfrm>
+          <a:prstGeom prst="rect">
+            <a:avLst/>
+          </a:prstGeom>
+        </p:spPr>
+        <p:txBody>
+          <a:bodyPr vert="horz" lIns="91440" tIns="45720" rIns="91440" bIns="45720" rtlCol="0">
+            <a:normAutofit/>
+          </a:bodyPr>
+          <a:lstStyle>
+            <a:lvl1pPr marL="380990" indent="-380990" algn="l" defTabSz="914400" rtl="0" eaLnBrk="1" latinLnBrk="0" hangingPunct="1">
+              <a:lnSpc>
+                <a:spcPct val="90000"/>
+              </a:lnSpc>
+              <a:spcBef>
+                <a:spcPts val="1000"/>
+              </a:spcBef>
+              <a:buClr>
+                <a:srgbClr val="235EE2"/>
+              </a:buClr>
+              <a:buSzPct val="70000"/>
+              <a:buFont typeface="Courier New"/>
+              <a:buChar char="o"/>
+              <a:defRPr sz="1867" b="0" i="0" kern="1200" baseline="0">
+                <a:solidFill>
+                  <a:schemeClr val="tx1">
+                    <a:lumMod val="75000"/>
+                    <a:lumOff val="25000"/>
+                  </a:schemeClr>
+                </a:solidFill>
+                <a:latin typeface="Aptos" panose="020B0004020202020204" pitchFamily="34" charset="0"/>
+                <a:ea typeface="+mn-ea"/>
+                <a:cs typeface="Aptos" panose="020B0004020202020204" pitchFamily="34" charset="0"/>
+              </a:defRPr>
+            </a:lvl1pPr>
+            <a:lvl2pPr marL="685800" indent="-228600" algn="l" defTabSz="914400" rtl="0" eaLnBrk="1" latinLnBrk="0" hangingPunct="1">
+              <a:lnSpc>
+                <a:spcPct val="90000"/>
+              </a:lnSpc>
+              <a:spcBef>
+                <a:spcPts val="500"/>
+              </a:spcBef>
+              <a:buClr>
+                <a:srgbClr val="235EE2"/>
+              </a:buClr>
+              <a:buSzPct val="70000"/>
+              <a:buFont typeface="Arial" panose="020B0604020202020204" pitchFamily="34" charset="0"/>
+              <a:buChar char="•"/>
+              <a:defRPr sz="1600" kern="1200" baseline="0">
+                <a:solidFill>
+                  <a:schemeClr val="tx1">
+                    <a:lumMod val="65000"/>
+                    <a:lumOff val="35000"/>
+                  </a:schemeClr>
+                </a:solidFill>
+                <a:latin typeface="Helvetica Light"/>
+                <a:ea typeface="+mn-ea"/>
+                <a:cs typeface="Helvetica Light"/>
+              </a:defRPr>
+            </a:lvl2pPr>
+            <a:lvl3pPr marL="1143000" indent="-228600" algn="l" defTabSz="914400" rtl="0" eaLnBrk="1" latinLnBrk="0" hangingPunct="1">
+              <a:lnSpc>
+                <a:spcPct val="90000"/>
+              </a:lnSpc>
+              <a:spcBef>
+                <a:spcPts val="500"/>
+              </a:spcBef>
+              <a:buFont typeface="Arial" panose="020B0604020202020204" pitchFamily="34" charset="0"/>
+              <a:buChar char="•"/>
+              <a:defRPr sz="2000" kern="1200">
+                <a:solidFill>
+                  <a:schemeClr val="tx1"/>
+                </a:solidFill>
+                <a:latin typeface="Avenir Heavy"/>
+                <a:ea typeface="+mn-ea"/>
+                <a:cs typeface="Avenir Heavy"/>
+              </a:defRPr>
+            </a:lvl3pPr>
+            <a:lvl4pPr marL="1600200" indent="-228600" algn="l" defTabSz="914400" rtl="0" eaLnBrk="1" latinLnBrk="0" hangingPunct="1">
+              <a:lnSpc>
+                <a:spcPct val="90000"/>
+              </a:lnSpc>
+              <a:spcBef>
+                <a:spcPts val="500"/>
+              </a:spcBef>
+              <a:buFont typeface="Arial" panose="020B0604020202020204" pitchFamily="34" charset="0"/>
+              <a:buChar char="•"/>
+              <a:defRPr sz="1800" kern="1200">
+                <a:solidFill>
+                  <a:schemeClr val="tx1"/>
+                </a:solidFill>
+                <a:latin typeface="Avenir Heavy"/>
+                <a:ea typeface="+mn-ea"/>
+                <a:cs typeface="Avenir Heavy"/>
+              </a:defRPr>
+            </a:lvl4pPr>
+            <a:lvl5pPr marL="2057400" indent="-228600" algn="l" defTabSz="914400" rtl="0" eaLnBrk="1" latinLnBrk="0" hangingPunct="1">
+              <a:lnSpc>
+                <a:spcPct val="90000"/>
+              </a:lnSpc>
+              <a:spcBef>
+                <a:spcPts val="500"/>
+              </a:spcBef>
+              <a:buFont typeface="Arial" panose="020B0604020202020204" pitchFamily="34" charset="0"/>
+              <a:buChar char="•"/>
+              <a:defRPr sz="1800" kern="1200">
+                <a:solidFill>
+                  <a:schemeClr val="tx1"/>
+                </a:solidFill>
+                <a:latin typeface="Avenir Heavy"/>
+                <a:ea typeface="+mn-ea"/>
+                <a:cs typeface="Avenir Heavy"/>
+              </a:defRPr>
+            </a:lvl5pPr>
+            <a:lvl6pPr marL="2514600" indent="-228600" algn="l" defTabSz="914400" rtl="0" eaLnBrk="1" latinLnBrk="0" hangingPunct="1">
+              <a:lnSpc>
+                <a:spcPct val="90000"/>
+              </a:lnSpc>
+              <a:spcBef>
+                <a:spcPts val="500"/>
+              </a:spcBef>
+              <a:buFont typeface="Arial" panose="020B0604020202020204" pitchFamily="34" charset="0"/>
+              <a:buChar char="•"/>
+              <a:defRPr sz="1800" kern="1200">
+                <a:solidFill>
+                  <a:schemeClr val="tx1"/>
+                </a:solidFill>
+                <a:latin typeface="+mn-lt"/>
+                <a:ea typeface="+mn-ea"/>
+                <a:cs typeface="+mn-cs"/>
+              </a:defRPr>
+            </a:lvl6pPr>
+            <a:lvl7pPr marL="2971800" indent="-228600" algn="l" defTabSz="914400" rtl="0" eaLnBrk="1" latinLnBrk="0" hangingPunct="1">
+              <a:lnSpc>
+                <a:spcPct val="90000"/>
+              </a:lnSpc>
+              <a:spcBef>
+                <a:spcPts val="500"/>
+              </a:spcBef>
+              <a:buFont typeface="Arial" panose="020B0604020202020204" pitchFamily="34" charset="0"/>
+              <a:buChar char="•"/>
+              <a:defRPr sz="1800" kern="1200">
+                <a:solidFill>
+                  <a:schemeClr val="tx1"/>
+                </a:solidFill>
+                <a:latin typeface="+mn-lt"/>
+                <a:ea typeface="+mn-ea"/>
+                <a:cs typeface="+mn-cs"/>
+              </a:defRPr>
+            </a:lvl7pPr>
+            <a:lvl8pPr marL="3429000" indent="-228600" algn="l" defTabSz="914400" rtl="0" eaLnBrk="1" latinLnBrk="0" hangingPunct="1">
+              <a:lnSpc>
+                <a:spcPct val="90000"/>
+              </a:lnSpc>
+              <a:spcBef>
+                <a:spcPts val="500"/>
+              </a:spcBef>
+              <a:buFont typeface="Arial" panose="020B0604020202020204" pitchFamily="34" charset="0"/>
+              <a:buChar char="•"/>
+              <a:defRPr sz="1800" kern="1200">
+                <a:solidFill>
+                  <a:schemeClr val="tx1"/>
+                </a:solidFill>
+                <a:latin typeface="+mn-lt"/>
+                <a:ea typeface="+mn-ea"/>
+                <a:cs typeface="+mn-cs"/>
+              </a:defRPr>
+            </a:lvl8pPr>
+            <a:lvl9pPr marL="3886200" indent="-228600" algn="l" defTabSz="914400" rtl="0" eaLnBrk="1" latinLnBrk="0" hangingPunct="1">
+              <a:lnSpc>
+                <a:spcPct val="90000"/>
+              </a:lnSpc>
+              <a:spcBef>
+                <a:spcPts val="500"/>
+              </a:spcBef>
+              <a:buFont typeface="Arial" panose="020B0604020202020204" pitchFamily="34" charset="0"/>
+              <a:buChar char="•"/>
+              <a:defRPr sz="1800" kern="1200">
+                <a:solidFill>
+                  <a:schemeClr val="tx1"/>
+                </a:solidFill>
+                <a:latin typeface="+mn-lt"/>
+                <a:ea typeface="+mn-ea"/>
+                <a:cs typeface="+mn-cs"/>
+              </a:defRPr>
+            </a:lvl9pPr>
+          </a:lstStyle>
+          <a:p>
+            <a:pPr marL="0" indent="0">
+              <a:buNone/>
+            </a:pPr>
+            <a:r>
+              <a:rPr lang="en-US" i="1" dirty="0"/>
+              <a:t>e.g. Linux Kernel</a:t>
+            </a:r>
+          </a:p>
+        </p:txBody>
+      </p:sp>
+      <p:sp>
+        <p:nvSpPr>
+          <p:cNvPr id="27" name="Text Placeholder 3">
+            <a:extLst>
+              <a:ext uri="{FF2B5EF4-FFF2-40B4-BE49-F238E27FC236}">
+                <a16:creationId xmlns:a16="http://schemas.microsoft.com/office/drawing/2014/main" id="{45FDF737-C1DB-DDCB-D4D0-BB5300EB945E}"/>
+              </a:ext>
+            </a:extLst>
+          </p:cNvPr>
+          <p:cNvSpPr txBox="1">
+            <a:spLocks/>
+          </p:cNvSpPr>
+          <p:nvPr/>
+        </p:nvSpPr>
+        <p:spPr>
+          <a:xfrm>
+            <a:off x="2791709" y="2883956"/>
+            <a:ext cx="1592179" cy="495952"/>
+          </a:xfrm>
+          <a:prstGeom prst="rect">
+            <a:avLst/>
+          </a:prstGeom>
+        </p:spPr>
+        <p:txBody>
+          <a:bodyPr vert="horz" lIns="91440" tIns="45720" rIns="91440" bIns="45720" rtlCol="0">
+            <a:normAutofit fontScale="92500"/>
+          </a:bodyPr>
+          <a:lstStyle>
+            <a:lvl1pPr marL="380990" indent="-380990" algn="l" defTabSz="914400" rtl="0" eaLnBrk="1" latinLnBrk="0" hangingPunct="1">
+              <a:lnSpc>
+                <a:spcPct val="90000"/>
+              </a:lnSpc>
+              <a:spcBef>
+                <a:spcPts val="1000"/>
+              </a:spcBef>
+              <a:buClr>
+                <a:srgbClr val="235EE2"/>
+              </a:buClr>
+              <a:buSzPct val="70000"/>
+              <a:buFont typeface="Courier New"/>
+              <a:buChar char="o"/>
+              <a:defRPr sz="1867" b="0" i="0" kern="1200" baseline="0">
+                <a:solidFill>
+                  <a:schemeClr val="tx1">
+                    <a:lumMod val="75000"/>
+                    <a:lumOff val="25000"/>
+                  </a:schemeClr>
+                </a:solidFill>
+                <a:latin typeface="Aptos" panose="020B0004020202020204" pitchFamily="34" charset="0"/>
+                <a:ea typeface="+mn-ea"/>
+                <a:cs typeface="Aptos" panose="020B0004020202020204" pitchFamily="34" charset="0"/>
+              </a:defRPr>
+            </a:lvl1pPr>
+            <a:lvl2pPr marL="685800" indent="-228600" algn="l" defTabSz="914400" rtl="0" eaLnBrk="1" latinLnBrk="0" hangingPunct="1">
+              <a:lnSpc>
+                <a:spcPct val="90000"/>
+              </a:lnSpc>
+              <a:spcBef>
+                <a:spcPts val="500"/>
+              </a:spcBef>
+              <a:buClr>
+                <a:srgbClr val="235EE2"/>
+              </a:buClr>
+              <a:buSzPct val="70000"/>
+              <a:buFont typeface="Arial" panose="020B0604020202020204" pitchFamily="34" charset="0"/>
+              <a:buChar char="•"/>
+              <a:defRPr sz="1600" kern="1200" baseline="0">
+                <a:solidFill>
+                  <a:schemeClr val="tx1">
+                    <a:lumMod val="65000"/>
+                    <a:lumOff val="35000"/>
+                  </a:schemeClr>
+                </a:solidFill>
+                <a:latin typeface="Helvetica Light"/>
+                <a:ea typeface="+mn-ea"/>
+                <a:cs typeface="Helvetica Light"/>
+              </a:defRPr>
+            </a:lvl2pPr>
+            <a:lvl3pPr marL="1143000" indent="-228600" algn="l" defTabSz="914400" rtl="0" eaLnBrk="1" latinLnBrk="0" hangingPunct="1">
+              <a:lnSpc>
+                <a:spcPct val="90000"/>
+              </a:lnSpc>
+              <a:spcBef>
+                <a:spcPts val="500"/>
+              </a:spcBef>
+              <a:buFont typeface="Arial" panose="020B0604020202020204" pitchFamily="34" charset="0"/>
+              <a:buChar char="•"/>
+              <a:defRPr sz="2000" kern="1200">
+                <a:solidFill>
+                  <a:schemeClr val="tx1"/>
+                </a:solidFill>
+                <a:latin typeface="Avenir Heavy"/>
+                <a:ea typeface="+mn-ea"/>
+                <a:cs typeface="Avenir Heavy"/>
+              </a:defRPr>
+            </a:lvl3pPr>
+            <a:lvl4pPr marL="1600200" indent="-228600" algn="l" defTabSz="914400" rtl="0" eaLnBrk="1" latinLnBrk="0" hangingPunct="1">
+              <a:lnSpc>
+                <a:spcPct val="90000"/>
+              </a:lnSpc>
+              <a:spcBef>
+                <a:spcPts val="500"/>
+              </a:spcBef>
+              <a:buFont typeface="Arial" panose="020B0604020202020204" pitchFamily="34" charset="0"/>
+              <a:buChar char="•"/>
+              <a:defRPr sz="1800" kern="1200">
+                <a:solidFill>
+                  <a:schemeClr val="tx1"/>
+                </a:solidFill>
+                <a:latin typeface="Avenir Heavy"/>
+                <a:ea typeface="+mn-ea"/>
+                <a:cs typeface="Avenir Heavy"/>
+              </a:defRPr>
+            </a:lvl4pPr>
+            <a:lvl5pPr marL="2057400" indent="-228600" algn="l" defTabSz="914400" rtl="0" eaLnBrk="1" latinLnBrk="0" hangingPunct="1">
+              <a:lnSpc>
+                <a:spcPct val="90000"/>
+              </a:lnSpc>
+              <a:spcBef>
+                <a:spcPts val="500"/>
+              </a:spcBef>
+              <a:buFont typeface="Arial" panose="020B0604020202020204" pitchFamily="34" charset="0"/>
+              <a:buChar char="•"/>
+              <a:defRPr sz="1800" kern="1200">
+                <a:solidFill>
+                  <a:schemeClr val="tx1"/>
+                </a:solidFill>
+                <a:latin typeface="Avenir Heavy"/>
+                <a:ea typeface="+mn-ea"/>
+                <a:cs typeface="Avenir Heavy"/>
+              </a:defRPr>
+            </a:lvl5pPr>
+            <a:lvl6pPr marL="2514600" indent="-228600" algn="l" defTabSz="914400" rtl="0" eaLnBrk="1" latinLnBrk="0" hangingPunct="1">
+              <a:lnSpc>
+                <a:spcPct val="90000"/>
+              </a:lnSpc>
+              <a:spcBef>
+                <a:spcPts val="500"/>
+              </a:spcBef>
+              <a:buFont typeface="Arial" panose="020B0604020202020204" pitchFamily="34" charset="0"/>
+              <a:buChar char="•"/>
+              <a:defRPr sz="1800" kern="1200">
+                <a:solidFill>
+                  <a:schemeClr val="tx1"/>
+                </a:solidFill>
+                <a:latin typeface="+mn-lt"/>
+                <a:ea typeface="+mn-ea"/>
+                <a:cs typeface="+mn-cs"/>
+              </a:defRPr>
+            </a:lvl6pPr>
+            <a:lvl7pPr marL="2971800" indent="-228600" algn="l" defTabSz="914400" rtl="0" eaLnBrk="1" latinLnBrk="0" hangingPunct="1">
+              <a:lnSpc>
+                <a:spcPct val="90000"/>
+              </a:lnSpc>
+              <a:spcBef>
+                <a:spcPts val="500"/>
+              </a:spcBef>
+              <a:buFont typeface="Arial" panose="020B0604020202020204" pitchFamily="34" charset="0"/>
+              <a:buChar char="•"/>
+              <a:defRPr sz="1800" kern="1200">
+                <a:solidFill>
+                  <a:schemeClr val="tx1"/>
+                </a:solidFill>
+                <a:latin typeface="+mn-lt"/>
+                <a:ea typeface="+mn-ea"/>
+                <a:cs typeface="+mn-cs"/>
+              </a:defRPr>
+            </a:lvl7pPr>
+            <a:lvl8pPr marL="3429000" indent="-228600" algn="l" defTabSz="914400" rtl="0" eaLnBrk="1" latinLnBrk="0" hangingPunct="1">
+              <a:lnSpc>
+                <a:spcPct val="90000"/>
+              </a:lnSpc>
+              <a:spcBef>
+                <a:spcPts val="500"/>
+              </a:spcBef>
+              <a:buFont typeface="Arial" panose="020B0604020202020204" pitchFamily="34" charset="0"/>
+              <a:buChar char="•"/>
+              <a:defRPr sz="1800" kern="1200">
+                <a:solidFill>
+                  <a:schemeClr val="tx1"/>
+                </a:solidFill>
+                <a:latin typeface="+mn-lt"/>
+                <a:ea typeface="+mn-ea"/>
+                <a:cs typeface="+mn-cs"/>
+              </a:defRPr>
+            </a:lvl8pPr>
+            <a:lvl9pPr marL="3886200" indent="-228600" algn="l" defTabSz="914400" rtl="0" eaLnBrk="1" latinLnBrk="0" hangingPunct="1">
+              <a:lnSpc>
+                <a:spcPct val="90000"/>
+              </a:lnSpc>
+              <a:spcBef>
+                <a:spcPts val="500"/>
+              </a:spcBef>
+              <a:buFont typeface="Arial" panose="020B0604020202020204" pitchFamily="34" charset="0"/>
+              <a:buChar char="•"/>
+              <a:defRPr sz="1800" kern="1200">
+                <a:solidFill>
+                  <a:schemeClr val="tx1"/>
+                </a:solidFill>
+                <a:latin typeface="+mn-lt"/>
+                <a:ea typeface="+mn-ea"/>
+                <a:cs typeface="+mn-cs"/>
+              </a:defRPr>
+            </a:lvl9pPr>
+          </a:lstStyle>
+          <a:p>
+            <a:pPr marL="0" indent="0">
+              <a:buNone/>
+            </a:pPr>
+            <a:r>
+              <a:rPr lang="en-US" i="1" dirty="0"/>
+              <a:t>e.g. </a:t>
+            </a:r>
+            <a:r>
+              <a:rPr lang="en-US" i="1" dirty="0" err="1"/>
+              <a:t>OpenPose</a:t>
+            </a:r>
+            <a:endParaRPr lang="en-US" i="1" dirty="0"/>
+          </a:p>
+        </p:txBody>
+      </p:sp>
+      <p:sp>
+        <p:nvSpPr>
+          <p:cNvPr id="28" name="Text Placeholder 3">
+            <a:extLst>
+              <a:ext uri="{FF2B5EF4-FFF2-40B4-BE49-F238E27FC236}">
+                <a16:creationId xmlns:a16="http://schemas.microsoft.com/office/drawing/2014/main" id="{3DCD04A5-9A48-35E4-9E40-4BEF40A59EF3}"/>
+              </a:ext>
+            </a:extLst>
+          </p:cNvPr>
+          <p:cNvSpPr txBox="1">
+            <a:spLocks/>
+          </p:cNvSpPr>
+          <p:nvPr/>
+        </p:nvSpPr>
+        <p:spPr>
+          <a:xfrm>
+            <a:off x="1262182" y="4559224"/>
+            <a:ext cx="4279251" cy="1049290"/>
+          </a:xfrm>
+          <a:prstGeom prst="rect">
+            <a:avLst/>
+          </a:prstGeom>
+        </p:spPr>
+        <p:txBody>
+          <a:bodyPr vert="horz" lIns="91440" tIns="45720" rIns="91440" bIns="45720" rtlCol="0">
+            <a:normAutofit/>
+          </a:bodyPr>
+          <a:lstStyle>
+            <a:lvl1pPr marL="380990" indent="-380990" algn="l" defTabSz="914400" rtl="0" eaLnBrk="1" latinLnBrk="0" hangingPunct="1">
+              <a:lnSpc>
+                <a:spcPct val="90000"/>
+              </a:lnSpc>
+              <a:spcBef>
+                <a:spcPts val="1000"/>
+              </a:spcBef>
+              <a:buClr>
+                <a:srgbClr val="235EE2"/>
+              </a:buClr>
+              <a:buSzPct val="70000"/>
+              <a:buFont typeface="Courier New"/>
+              <a:buChar char="o"/>
+              <a:defRPr sz="1867" b="0" i="0" kern="1200" baseline="0">
+                <a:solidFill>
+                  <a:schemeClr val="tx1">
+                    <a:lumMod val="75000"/>
+                    <a:lumOff val="25000"/>
+                  </a:schemeClr>
+                </a:solidFill>
+                <a:latin typeface="Aptos" panose="020B0004020202020204" pitchFamily="34" charset="0"/>
+                <a:ea typeface="+mn-ea"/>
+                <a:cs typeface="Aptos" panose="020B0004020202020204" pitchFamily="34" charset="0"/>
+              </a:defRPr>
+            </a:lvl1pPr>
+            <a:lvl2pPr marL="685800" indent="-228600" algn="l" defTabSz="914400" rtl="0" eaLnBrk="1" latinLnBrk="0" hangingPunct="1">
+              <a:lnSpc>
+                <a:spcPct val="90000"/>
+              </a:lnSpc>
+              <a:spcBef>
+                <a:spcPts val="500"/>
+              </a:spcBef>
+              <a:buClr>
+                <a:srgbClr val="235EE2"/>
+              </a:buClr>
+              <a:buSzPct val="70000"/>
+              <a:buFont typeface="Arial" panose="020B0604020202020204" pitchFamily="34" charset="0"/>
+              <a:buChar char="•"/>
+              <a:defRPr sz="1600" kern="1200" baseline="0">
+                <a:solidFill>
+                  <a:schemeClr val="tx1">
+                    <a:lumMod val="65000"/>
+                    <a:lumOff val="35000"/>
+                  </a:schemeClr>
+                </a:solidFill>
+                <a:latin typeface="Helvetica Light"/>
+                <a:ea typeface="+mn-ea"/>
+                <a:cs typeface="Helvetica Light"/>
+              </a:defRPr>
+            </a:lvl2pPr>
+            <a:lvl3pPr marL="1143000" indent="-228600" algn="l" defTabSz="914400" rtl="0" eaLnBrk="1" latinLnBrk="0" hangingPunct="1">
+              <a:lnSpc>
+                <a:spcPct val="90000"/>
+              </a:lnSpc>
+              <a:spcBef>
+                <a:spcPts val="500"/>
+              </a:spcBef>
+              <a:buFont typeface="Arial" panose="020B0604020202020204" pitchFamily="34" charset="0"/>
+              <a:buChar char="•"/>
+              <a:defRPr sz="2000" kern="1200">
+                <a:solidFill>
+                  <a:schemeClr val="tx1"/>
+                </a:solidFill>
+                <a:latin typeface="Avenir Heavy"/>
+                <a:ea typeface="+mn-ea"/>
+                <a:cs typeface="Avenir Heavy"/>
+              </a:defRPr>
+            </a:lvl3pPr>
+            <a:lvl4pPr marL="1600200" indent="-228600" algn="l" defTabSz="914400" rtl="0" eaLnBrk="1" latinLnBrk="0" hangingPunct="1">
+              <a:lnSpc>
+                <a:spcPct val="90000"/>
+              </a:lnSpc>
+              <a:spcBef>
+                <a:spcPts val="500"/>
+              </a:spcBef>
+              <a:buFont typeface="Arial" panose="020B0604020202020204" pitchFamily="34" charset="0"/>
+              <a:buChar char="•"/>
+              <a:defRPr sz="1800" kern="1200">
+                <a:solidFill>
+                  <a:schemeClr val="tx1"/>
+                </a:solidFill>
+                <a:latin typeface="Avenir Heavy"/>
+                <a:ea typeface="+mn-ea"/>
+                <a:cs typeface="Avenir Heavy"/>
+              </a:defRPr>
+            </a:lvl4pPr>
+            <a:lvl5pPr marL="2057400" indent="-228600" algn="l" defTabSz="914400" rtl="0" eaLnBrk="1" latinLnBrk="0" hangingPunct="1">
+              <a:lnSpc>
+                <a:spcPct val="90000"/>
+              </a:lnSpc>
+              <a:spcBef>
+                <a:spcPts val="500"/>
+              </a:spcBef>
+              <a:buFont typeface="Arial" panose="020B0604020202020204" pitchFamily="34" charset="0"/>
+              <a:buChar char="•"/>
+              <a:defRPr sz="1800" kern="1200">
+                <a:solidFill>
+                  <a:schemeClr val="tx1"/>
+                </a:solidFill>
+                <a:latin typeface="Avenir Heavy"/>
+                <a:ea typeface="+mn-ea"/>
+                <a:cs typeface="Avenir Heavy"/>
+              </a:defRPr>
+            </a:lvl5pPr>
+            <a:lvl6pPr marL="2514600" indent="-228600" algn="l" defTabSz="914400" rtl="0" eaLnBrk="1" latinLnBrk="0" hangingPunct="1">
+              <a:lnSpc>
+                <a:spcPct val="90000"/>
+              </a:lnSpc>
+              <a:spcBef>
+                <a:spcPts val="500"/>
+              </a:spcBef>
+              <a:buFont typeface="Arial" panose="020B0604020202020204" pitchFamily="34" charset="0"/>
+              <a:buChar char="•"/>
+              <a:defRPr sz="1800" kern="1200">
+                <a:solidFill>
+                  <a:schemeClr val="tx1"/>
+                </a:solidFill>
+                <a:latin typeface="+mn-lt"/>
+                <a:ea typeface="+mn-ea"/>
+                <a:cs typeface="+mn-cs"/>
+              </a:defRPr>
+            </a:lvl6pPr>
+            <a:lvl7pPr marL="2971800" indent="-228600" algn="l" defTabSz="914400" rtl="0" eaLnBrk="1" latinLnBrk="0" hangingPunct="1">
+              <a:lnSpc>
+                <a:spcPct val="90000"/>
+              </a:lnSpc>
+              <a:spcBef>
+                <a:spcPts val="500"/>
+              </a:spcBef>
+              <a:buFont typeface="Arial" panose="020B0604020202020204" pitchFamily="34" charset="0"/>
+              <a:buChar char="•"/>
+              <a:defRPr sz="1800" kern="1200">
+                <a:solidFill>
+                  <a:schemeClr val="tx1"/>
+                </a:solidFill>
+                <a:latin typeface="+mn-lt"/>
+                <a:ea typeface="+mn-ea"/>
+                <a:cs typeface="+mn-cs"/>
+              </a:defRPr>
+            </a:lvl7pPr>
+            <a:lvl8pPr marL="3429000" indent="-228600" algn="l" defTabSz="914400" rtl="0" eaLnBrk="1" latinLnBrk="0" hangingPunct="1">
+              <a:lnSpc>
+                <a:spcPct val="90000"/>
+              </a:lnSpc>
+              <a:spcBef>
+                <a:spcPts val="500"/>
+              </a:spcBef>
+              <a:buFont typeface="Arial" panose="020B0604020202020204" pitchFamily="34" charset="0"/>
+              <a:buChar char="•"/>
+              <a:defRPr sz="1800" kern="1200">
+                <a:solidFill>
+                  <a:schemeClr val="tx1"/>
+                </a:solidFill>
+                <a:latin typeface="+mn-lt"/>
+                <a:ea typeface="+mn-ea"/>
+                <a:cs typeface="+mn-cs"/>
+              </a:defRPr>
+            </a:lvl8pPr>
+            <a:lvl9pPr marL="3886200" indent="-228600" algn="l" defTabSz="914400" rtl="0" eaLnBrk="1" latinLnBrk="0" hangingPunct="1">
+              <a:lnSpc>
+                <a:spcPct val="90000"/>
+              </a:lnSpc>
+              <a:spcBef>
+                <a:spcPts val="500"/>
+              </a:spcBef>
+              <a:buFont typeface="Arial" panose="020B0604020202020204" pitchFamily="34" charset="0"/>
+              <a:buChar char="•"/>
+              <a:defRPr sz="1800" kern="1200">
+                <a:solidFill>
+                  <a:schemeClr val="tx1"/>
+                </a:solidFill>
+                <a:latin typeface="+mn-lt"/>
+                <a:ea typeface="+mn-ea"/>
+                <a:cs typeface="+mn-cs"/>
+              </a:defRPr>
+            </a:lvl9pPr>
+          </a:lstStyle>
+          <a:p>
+            <a:pPr marL="0" indent="0" algn="ctr">
+              <a:buNone/>
+            </a:pPr>
+            <a:r>
+              <a:rPr lang="en-US" sz="1700" b="1" dirty="0"/>
+              <a:t>Creative Commons Attribution Non Commercial (Share Alike)</a:t>
+            </a:r>
+          </a:p>
+        </p:txBody>
+      </p:sp>
+      <p:sp>
+        <p:nvSpPr>
+          <p:cNvPr id="29" name="Text Placeholder 3">
+            <a:extLst>
+              <a:ext uri="{FF2B5EF4-FFF2-40B4-BE49-F238E27FC236}">
+                <a16:creationId xmlns:a16="http://schemas.microsoft.com/office/drawing/2014/main" id="{714908ED-8B6B-B7CE-618C-8932E325FCB1}"/>
+              </a:ext>
+            </a:extLst>
+          </p:cNvPr>
+          <p:cNvSpPr txBox="1">
+            <a:spLocks/>
+          </p:cNvSpPr>
+          <p:nvPr/>
+        </p:nvSpPr>
+        <p:spPr>
+          <a:xfrm>
+            <a:off x="2154060" y="5107997"/>
+            <a:ext cx="2506238" cy="1175369"/>
+          </a:xfrm>
+          <a:prstGeom prst="rect">
+            <a:avLst/>
+          </a:prstGeom>
+        </p:spPr>
+        <p:txBody>
+          <a:bodyPr vert="horz" lIns="91440" tIns="45720" rIns="91440" bIns="45720" rtlCol="0">
+            <a:normAutofit/>
+          </a:bodyPr>
+          <a:lstStyle>
+            <a:lvl1pPr marL="380990" indent="-380990" algn="l" defTabSz="914400" rtl="0" eaLnBrk="1" latinLnBrk="0" hangingPunct="1">
+              <a:lnSpc>
+                <a:spcPct val="90000"/>
+              </a:lnSpc>
+              <a:spcBef>
+                <a:spcPts val="1000"/>
+              </a:spcBef>
+              <a:buClr>
+                <a:srgbClr val="235EE2"/>
+              </a:buClr>
+              <a:buSzPct val="70000"/>
+              <a:buFont typeface="Courier New"/>
+              <a:buChar char="o"/>
+              <a:defRPr sz="1867" b="0" i="0" kern="1200" baseline="0">
+                <a:solidFill>
+                  <a:schemeClr val="tx1">
+                    <a:lumMod val="75000"/>
+                    <a:lumOff val="25000"/>
+                  </a:schemeClr>
+                </a:solidFill>
+                <a:latin typeface="Aptos" panose="020B0004020202020204" pitchFamily="34" charset="0"/>
+                <a:ea typeface="+mn-ea"/>
+                <a:cs typeface="Aptos" panose="020B0004020202020204" pitchFamily="34" charset="0"/>
+              </a:defRPr>
+            </a:lvl1pPr>
+            <a:lvl2pPr marL="685800" indent="-228600" algn="l" defTabSz="914400" rtl="0" eaLnBrk="1" latinLnBrk="0" hangingPunct="1">
+              <a:lnSpc>
+                <a:spcPct val="90000"/>
+              </a:lnSpc>
+              <a:spcBef>
+                <a:spcPts val="500"/>
+              </a:spcBef>
+              <a:buClr>
+                <a:srgbClr val="235EE2"/>
+              </a:buClr>
+              <a:buSzPct val="70000"/>
+              <a:buFont typeface="Arial" panose="020B0604020202020204" pitchFamily="34" charset="0"/>
+              <a:buChar char="•"/>
+              <a:defRPr sz="1600" kern="1200" baseline="0">
+                <a:solidFill>
+                  <a:schemeClr val="tx1">
+                    <a:lumMod val="65000"/>
+                    <a:lumOff val="35000"/>
+                  </a:schemeClr>
+                </a:solidFill>
+                <a:latin typeface="Helvetica Light"/>
+                <a:ea typeface="+mn-ea"/>
+                <a:cs typeface="Helvetica Light"/>
+              </a:defRPr>
+            </a:lvl2pPr>
+            <a:lvl3pPr marL="1143000" indent="-228600" algn="l" defTabSz="914400" rtl="0" eaLnBrk="1" latinLnBrk="0" hangingPunct="1">
+              <a:lnSpc>
+                <a:spcPct val="90000"/>
+              </a:lnSpc>
+              <a:spcBef>
+                <a:spcPts val="500"/>
+              </a:spcBef>
+              <a:buFont typeface="Arial" panose="020B0604020202020204" pitchFamily="34" charset="0"/>
+              <a:buChar char="•"/>
+              <a:defRPr sz="2000" kern="1200">
+                <a:solidFill>
+                  <a:schemeClr val="tx1"/>
+                </a:solidFill>
+                <a:latin typeface="Avenir Heavy"/>
+                <a:ea typeface="+mn-ea"/>
+                <a:cs typeface="Avenir Heavy"/>
+              </a:defRPr>
+            </a:lvl3pPr>
+            <a:lvl4pPr marL="1600200" indent="-228600" algn="l" defTabSz="914400" rtl="0" eaLnBrk="1" latinLnBrk="0" hangingPunct="1">
+              <a:lnSpc>
+                <a:spcPct val="90000"/>
+              </a:lnSpc>
+              <a:spcBef>
+                <a:spcPts val="500"/>
+              </a:spcBef>
+              <a:buFont typeface="Arial" panose="020B0604020202020204" pitchFamily="34" charset="0"/>
+              <a:buChar char="•"/>
+              <a:defRPr sz="1800" kern="1200">
+                <a:solidFill>
+                  <a:schemeClr val="tx1"/>
+                </a:solidFill>
+                <a:latin typeface="Avenir Heavy"/>
+                <a:ea typeface="+mn-ea"/>
+                <a:cs typeface="Avenir Heavy"/>
+              </a:defRPr>
+            </a:lvl4pPr>
+            <a:lvl5pPr marL="2057400" indent="-228600" algn="l" defTabSz="914400" rtl="0" eaLnBrk="1" latinLnBrk="0" hangingPunct="1">
+              <a:lnSpc>
+                <a:spcPct val="90000"/>
+              </a:lnSpc>
+              <a:spcBef>
+                <a:spcPts val="500"/>
+              </a:spcBef>
+              <a:buFont typeface="Arial" panose="020B0604020202020204" pitchFamily="34" charset="0"/>
+              <a:buChar char="•"/>
+              <a:defRPr sz="1800" kern="1200">
+                <a:solidFill>
+                  <a:schemeClr val="tx1"/>
+                </a:solidFill>
+                <a:latin typeface="Avenir Heavy"/>
+                <a:ea typeface="+mn-ea"/>
+                <a:cs typeface="Avenir Heavy"/>
+              </a:defRPr>
+            </a:lvl5pPr>
+            <a:lvl6pPr marL="2514600" indent="-228600" algn="l" defTabSz="914400" rtl="0" eaLnBrk="1" latinLnBrk="0" hangingPunct="1">
+              <a:lnSpc>
+                <a:spcPct val="90000"/>
+              </a:lnSpc>
+              <a:spcBef>
+                <a:spcPts val="500"/>
+              </a:spcBef>
+              <a:buFont typeface="Arial" panose="020B0604020202020204" pitchFamily="34" charset="0"/>
+              <a:buChar char="•"/>
+              <a:defRPr sz="1800" kern="1200">
+                <a:solidFill>
+                  <a:schemeClr val="tx1"/>
+                </a:solidFill>
+                <a:latin typeface="+mn-lt"/>
+                <a:ea typeface="+mn-ea"/>
+                <a:cs typeface="+mn-cs"/>
+              </a:defRPr>
+            </a:lvl6pPr>
+            <a:lvl7pPr marL="2971800" indent="-228600" algn="l" defTabSz="914400" rtl="0" eaLnBrk="1" latinLnBrk="0" hangingPunct="1">
+              <a:lnSpc>
+                <a:spcPct val="90000"/>
+              </a:lnSpc>
+              <a:spcBef>
+                <a:spcPts val="500"/>
+              </a:spcBef>
+              <a:buFont typeface="Arial" panose="020B0604020202020204" pitchFamily="34" charset="0"/>
+              <a:buChar char="•"/>
+              <a:defRPr sz="1800" kern="1200">
+                <a:solidFill>
+                  <a:schemeClr val="tx1"/>
+                </a:solidFill>
+                <a:latin typeface="+mn-lt"/>
+                <a:ea typeface="+mn-ea"/>
+                <a:cs typeface="+mn-cs"/>
+              </a:defRPr>
+            </a:lvl7pPr>
+            <a:lvl8pPr marL="3429000" indent="-228600" algn="l" defTabSz="914400" rtl="0" eaLnBrk="1" latinLnBrk="0" hangingPunct="1">
+              <a:lnSpc>
+                <a:spcPct val="90000"/>
+              </a:lnSpc>
+              <a:spcBef>
+                <a:spcPts val="500"/>
+              </a:spcBef>
+              <a:buFont typeface="Arial" panose="020B0604020202020204" pitchFamily="34" charset="0"/>
+              <a:buChar char="•"/>
+              <a:defRPr sz="1800" kern="1200">
+                <a:solidFill>
+                  <a:schemeClr val="tx1"/>
+                </a:solidFill>
+                <a:latin typeface="+mn-lt"/>
+                <a:ea typeface="+mn-ea"/>
+                <a:cs typeface="+mn-cs"/>
+              </a:defRPr>
+            </a:lvl8pPr>
+            <a:lvl9pPr marL="3886200" indent="-228600" algn="l" defTabSz="914400" rtl="0" eaLnBrk="1" latinLnBrk="0" hangingPunct="1">
+              <a:lnSpc>
+                <a:spcPct val="90000"/>
+              </a:lnSpc>
+              <a:spcBef>
+                <a:spcPts val="500"/>
+              </a:spcBef>
+              <a:buFont typeface="Arial" panose="020B0604020202020204" pitchFamily="34" charset="0"/>
+              <a:buChar char="•"/>
+              <a:defRPr sz="1800" kern="1200">
+                <a:solidFill>
+                  <a:schemeClr val="tx1"/>
+                </a:solidFill>
+                <a:latin typeface="+mn-lt"/>
+                <a:ea typeface="+mn-ea"/>
+                <a:cs typeface="+mn-cs"/>
+              </a:defRPr>
+            </a:lvl9pPr>
+          </a:lstStyle>
+          <a:p>
+            <a:pPr marL="0" indent="0" algn="ctr">
+              <a:buNone/>
+            </a:pPr>
+            <a:r>
+              <a:rPr lang="en-US" i="1" dirty="0"/>
+              <a:t>e.g. Meta “Segment Anything Model”</a:t>
             </a:r>
           </a:p>
         </p:txBody>
@@ -6916,6 +8934,318 @@
     <p:extLst>
       <p:ext uri="{BB962C8B-B14F-4D97-AF65-F5344CB8AC3E}">
         <p14:creationId xmlns:p14="http://schemas.microsoft.com/office/powerpoint/2010/main" val="3643261532"/>
+      </p:ext>
+    </p:extLst>
+  </p:cSld>
+  <p:clrMapOvr>
+    <a:masterClrMapping/>
+  </p:clrMapOvr>
+</p:sld>
+</file>
+
+<file path=ppt/slides/slide13.xml><?xml version="1.0" encoding="utf-8"?>
+<p:sld xmlns:a="http://schemas.openxmlformats.org/drawingml/2006/main" xmlns:r="http://schemas.openxmlformats.org/officeDocument/2006/relationships" xmlns:p="http://schemas.openxmlformats.org/presentationml/2006/main">
+  <p:cSld>
+    <p:spTree>
+      <p:nvGrpSpPr>
+        <p:cNvPr id="1" name=""/>
+        <p:cNvGrpSpPr/>
+        <p:nvPr/>
+      </p:nvGrpSpPr>
+      <p:grpSpPr>
+        <a:xfrm>
+          <a:off x="0" y="0"/>
+          <a:ext cx="0" cy="0"/>
+          <a:chOff x="0" y="0"/>
+          <a:chExt cx="0" cy="0"/>
+        </a:xfrm>
+      </p:grpSpPr>
+      <p:sp>
+        <p:nvSpPr>
+          <p:cNvPr id="2" name="Text Placeholder 1">
+            <a:extLst>
+              <a:ext uri="{FF2B5EF4-FFF2-40B4-BE49-F238E27FC236}">
+                <a16:creationId xmlns:a16="http://schemas.microsoft.com/office/drawing/2014/main" id="{23AC0913-7678-7088-0C8A-69CC9CD87457}"/>
+              </a:ext>
+            </a:extLst>
+          </p:cNvPr>
+          <p:cNvSpPr>
+            <a:spLocks noGrp="1"/>
+          </p:cNvSpPr>
+          <p:nvPr>
+            <p:ph type="body" sz="quarter" idx="10"/>
+          </p:nvPr>
+        </p:nvSpPr>
+        <p:spPr/>
+        <p:txBody>
+          <a:bodyPr/>
+          <a:lstStyle/>
+          <a:p>
+            <a:r>
+              <a:rPr lang="en-US" dirty="0"/>
+              <a:t>Getting Set Up with Pods</a:t>
+            </a:r>
+          </a:p>
+        </p:txBody>
+      </p:sp>
+      <p:sp>
+        <p:nvSpPr>
+          <p:cNvPr id="4" name="Text Placeholder 3">
+            <a:extLst>
+              <a:ext uri="{FF2B5EF4-FFF2-40B4-BE49-F238E27FC236}">
+                <a16:creationId xmlns:a16="http://schemas.microsoft.com/office/drawing/2014/main" id="{27D5D536-D61C-6796-C14C-A06789A4FDC3}"/>
+              </a:ext>
+            </a:extLst>
+          </p:cNvPr>
+          <p:cNvSpPr>
+            <a:spLocks noGrp="1"/>
+          </p:cNvSpPr>
+          <p:nvPr>
+            <p:ph type="body" sz="quarter" idx="12"/>
+          </p:nvPr>
+        </p:nvSpPr>
+        <p:spPr>
+          <a:xfrm>
+            <a:off x="503659" y="1152335"/>
+            <a:ext cx="11176000" cy="4892866"/>
+          </a:xfrm>
+        </p:spPr>
+        <p:txBody>
+          <a:bodyPr>
+            <a:normAutofit/>
+          </a:bodyPr>
+          <a:lstStyle/>
+          <a:p>
+            <a:r>
+              <a:rPr lang="en-US" sz="1870" dirty="0"/>
+              <a:t>Head to </a:t>
+            </a:r>
+            <a:r>
+              <a:rPr lang="en-US" sz="1870" b="1" dirty="0" err="1"/>
+              <a:t>pods.acceleratescience.co.uk</a:t>
+            </a:r>
+            <a:endParaRPr lang="en-US" sz="1870" b="1" dirty="0"/>
+          </a:p>
+          <a:p>
+            <a:pPr marL="914400" lvl="1" indent="-457200"/>
+            <a:r>
+              <a:rPr lang="en-US" sz="1870" b="1" dirty="0">
+                <a:solidFill>
+                  <a:schemeClr val="tx1">
+                    <a:lumMod val="75000"/>
+                    <a:lumOff val="25000"/>
+                  </a:schemeClr>
+                </a:solidFill>
+                <a:latin typeface="Aptos" panose="020B0004020202020204" pitchFamily="34" charset="0"/>
+              </a:rPr>
+              <a:t>Username: </a:t>
+            </a:r>
+            <a:r>
+              <a:rPr lang="en-US" sz="1870" dirty="0" err="1">
+                <a:solidFill>
+                  <a:schemeClr val="tx1">
+                    <a:lumMod val="75000"/>
+                    <a:lumOff val="25000"/>
+                  </a:schemeClr>
+                </a:solidFill>
+                <a:latin typeface="Aptos" panose="020B0004020202020204" pitchFamily="34" charset="0"/>
+              </a:rPr>
+              <a:t>CRSid</a:t>
+            </a:r>
+            <a:endParaRPr lang="en-US" sz="1870" dirty="0">
+              <a:solidFill>
+                <a:schemeClr val="tx1">
+                  <a:lumMod val="75000"/>
+                  <a:lumOff val="25000"/>
+                </a:schemeClr>
+              </a:solidFill>
+              <a:latin typeface="Aptos" panose="020B0004020202020204" pitchFamily="34" charset="0"/>
+            </a:endParaRPr>
+          </a:p>
+          <a:p>
+            <a:pPr marL="914400" lvl="1" indent="-457200">
+              <a:lnSpc>
+                <a:spcPct val="150000"/>
+              </a:lnSpc>
+            </a:pPr>
+            <a:r>
+              <a:rPr lang="en-US" sz="1870" b="1" dirty="0">
+                <a:solidFill>
+                  <a:schemeClr val="tx1">
+                    <a:lumMod val="75000"/>
+                    <a:lumOff val="25000"/>
+                  </a:schemeClr>
+                </a:solidFill>
+                <a:latin typeface="Aptos" panose="020B0004020202020204" pitchFamily="34" charset="0"/>
+              </a:rPr>
+              <a:t>Password: </a:t>
+            </a:r>
+            <a:r>
+              <a:rPr lang="en-US" sz="1870" dirty="0">
+                <a:solidFill>
+                  <a:schemeClr val="tx1">
+                    <a:lumMod val="75000"/>
+                    <a:lumOff val="25000"/>
+                  </a:schemeClr>
+                </a:solidFill>
+                <a:latin typeface="Aptos" panose="020B0004020202020204" pitchFamily="34" charset="0"/>
+              </a:rPr>
+              <a:t>Acceler8</a:t>
+            </a:r>
+          </a:p>
+          <a:p>
+            <a:pPr>
+              <a:lnSpc>
+                <a:spcPct val="150000"/>
+              </a:lnSpc>
+            </a:pPr>
+            <a:r>
+              <a:rPr lang="en-US" sz="1870" dirty="0"/>
+              <a:t>Choose </a:t>
+            </a:r>
+            <a:r>
+              <a:rPr lang="en-US" sz="1870" dirty="0" err="1"/>
+              <a:t>VSCode</a:t>
+            </a:r>
+            <a:r>
+              <a:rPr lang="en-US" sz="1870" dirty="0"/>
+              <a:t> as your IDE</a:t>
+            </a:r>
+          </a:p>
+          <a:p>
+            <a:pPr marL="0" indent="0">
+              <a:buNone/>
+            </a:pPr>
+            <a:endParaRPr lang="en-US" sz="1870" dirty="0"/>
+          </a:p>
+          <a:p>
+            <a:pPr marL="0" indent="0">
+              <a:buNone/>
+            </a:pPr>
+            <a:endParaRPr lang="en-US" sz="1870" dirty="0"/>
+          </a:p>
+          <a:p>
+            <a:pPr marL="0" indent="0">
+              <a:buNone/>
+            </a:pPr>
+            <a:endParaRPr lang="en-US" sz="1870" dirty="0"/>
+          </a:p>
+          <a:p>
+            <a:pPr marL="0" indent="0">
+              <a:buNone/>
+            </a:pPr>
+            <a:endParaRPr lang="en-US" sz="1870" dirty="0"/>
+          </a:p>
+          <a:p>
+            <a:r>
+              <a:rPr lang="en-US" sz="1870" dirty="0"/>
+              <a:t>When running a notebook, you will be prompted to select a python interpreter. Navigate to Python Environments and select the </a:t>
+            </a:r>
+            <a:r>
+              <a:rPr lang="en-US" sz="1870" i="1" dirty="0"/>
+              <a:t>.</a:t>
+            </a:r>
+            <a:r>
+              <a:rPr lang="en-US" sz="1870" i="1" dirty="0" err="1"/>
+              <a:t>venv</a:t>
+            </a:r>
+            <a:r>
+              <a:rPr lang="en-US" sz="1870" i="1" dirty="0"/>
+              <a:t>/ </a:t>
+            </a:r>
+            <a:r>
+              <a:rPr lang="en-US" sz="1870" dirty="0"/>
+              <a:t>directory</a:t>
+            </a:r>
+          </a:p>
+        </p:txBody>
+      </p:sp>
+      <p:pic>
+        <p:nvPicPr>
+          <p:cNvPr id="7" name="Picture 6">
+            <a:extLst>
+              <a:ext uri="{FF2B5EF4-FFF2-40B4-BE49-F238E27FC236}">
+                <a16:creationId xmlns:a16="http://schemas.microsoft.com/office/drawing/2014/main" id="{21D1564C-3157-E018-CD51-0FA9F3CA99D7}"/>
+              </a:ext>
+            </a:extLst>
+          </p:cNvPr>
+          <p:cNvPicPr>
+            <a:picLocks noChangeAspect="1"/>
+          </p:cNvPicPr>
+          <p:nvPr/>
+        </p:nvPicPr>
+        <p:blipFill>
+          <a:blip r:embed="rId2"/>
+          <a:stretch>
+            <a:fillRect/>
+          </a:stretch>
+        </p:blipFill>
+        <p:spPr>
+          <a:xfrm>
+            <a:off x="958970" y="2847975"/>
+            <a:ext cx="3886200" cy="1162050"/>
+          </a:xfrm>
+          <a:prstGeom prst="rect">
+            <a:avLst/>
+          </a:prstGeom>
+        </p:spPr>
+      </p:pic>
+      <p:sp>
+        <p:nvSpPr>
+          <p:cNvPr id="8" name="Oval 7">
+            <a:extLst>
+              <a:ext uri="{FF2B5EF4-FFF2-40B4-BE49-F238E27FC236}">
+                <a16:creationId xmlns:a16="http://schemas.microsoft.com/office/drawing/2014/main" id="{B3FCB599-DA0D-78B2-24A6-83A6F73A120A}"/>
+              </a:ext>
+            </a:extLst>
+          </p:cNvPr>
+          <p:cNvSpPr/>
+          <p:nvPr/>
+        </p:nvSpPr>
+        <p:spPr>
+          <a:xfrm>
+            <a:off x="2009955" y="3183147"/>
+            <a:ext cx="892115" cy="826878"/>
+          </a:xfrm>
+          <a:prstGeom prst="ellipse">
+            <a:avLst/>
+          </a:prstGeom>
+          <a:noFill/>
+          <a:ln w="38100">
+            <a:solidFill>
+              <a:srgbClr val="FF0000"/>
+            </a:solidFill>
+          </a:ln>
+        </p:spPr>
+        <p:style>
+          <a:lnRef idx="2">
+            <a:schemeClr val="accent1">
+              <a:shade val="15000"/>
+            </a:schemeClr>
+          </a:lnRef>
+          <a:fillRef idx="1">
+            <a:schemeClr val="accent1"/>
+          </a:fillRef>
+          <a:effectRef idx="0">
+            <a:schemeClr val="accent1"/>
+          </a:effectRef>
+          <a:fontRef idx="minor">
+            <a:schemeClr val="lt1"/>
+          </a:fontRef>
+        </p:style>
+        <p:txBody>
+          <a:bodyPr rtlCol="0" anchor="ctr"/>
+          <a:lstStyle/>
+          <a:p>
+            <a:pPr algn="ctr"/>
+            <a:endParaRPr lang="en-US"/>
+          </a:p>
+        </p:txBody>
+      </p:sp>
+    </p:spTree>
+    <p:extLst>
+      <p:ext uri="{BB962C8B-B14F-4D97-AF65-F5344CB8AC3E}">
+        <p14:creationId xmlns:p14="http://schemas.microsoft.com/office/powerpoint/2010/main" val="1495705753"/>
       </p:ext>
     </p:extLst>
   </p:cSld>

--- a/packaging-publishing/Slides/2_versioncontrol.pptx
+++ b/packaging-publishing/Slides/2_versioncontrol.pptx
@@ -140,7 +140,7 @@
   <pc:docChgLst>
     <pc:chgData name="Finley Griffin" userId="22b0b6c4-ce40-4dd6-a0c2-f0f65dd91442" providerId="ADAL" clId="{E340F9FE-63CF-5DC1-BB85-0501F5A6B451}"/>
     <pc:docChg chg="undo custSel addSld modSld">
-      <pc:chgData name="Finley Griffin" userId="22b0b6c4-ce40-4dd6-a0c2-f0f65dd91442" providerId="ADAL" clId="{E340F9FE-63CF-5DC1-BB85-0501F5A6B451}" dt="2026-03-06T10:11:05.088" v="668" actId="20577"/>
+      <pc:chgData name="Finley Griffin" userId="22b0b6c4-ce40-4dd6-a0c2-f0f65dd91442" providerId="ADAL" clId="{E340F9FE-63CF-5DC1-BB85-0501F5A6B451}" dt="2026-03-10T13:41:00.208" v="888" actId="20577"/>
       <pc:docMkLst>
         <pc:docMk/>
       </pc:docMkLst>
@@ -192,14 +192,6 @@
           <pc:docMk/>
           <pc:sldMk cId="3643261532" sldId="330"/>
         </pc:sldMkLst>
-        <pc:spChg chg="del">
-          <ac:chgData name="Finley Griffin" userId="22b0b6c4-ce40-4dd6-a0c2-f0f65dd91442" providerId="ADAL" clId="{E340F9FE-63CF-5DC1-BB85-0501F5A6B451}" dt="2026-03-05T14:01:43.028" v="6" actId="478"/>
-          <ac:spMkLst>
-            <pc:docMk/>
-            <pc:sldMk cId="3643261532" sldId="330"/>
-            <ac:spMk id="4" creationId="{696BCD64-7D07-7275-9161-A544A4FFA03A}"/>
-          </ac:spMkLst>
-        </pc:spChg>
         <pc:spChg chg="mod">
           <ac:chgData name="Finley Griffin" userId="22b0b6c4-ce40-4dd6-a0c2-f0f65dd91442" providerId="ADAL" clId="{E340F9FE-63CF-5DC1-BB85-0501F5A6B451}" dt="2026-03-05T14:12:54.833" v="439" actId="255"/>
           <ac:spMkLst>
@@ -208,36 +200,12 @@
             <ac:spMk id="6" creationId="{667A7450-5E4F-62F0-3B59-3CF8D4B2EAA4}"/>
           </ac:spMkLst>
         </pc:spChg>
-        <pc:spChg chg="add del mod">
-          <ac:chgData name="Finley Griffin" userId="22b0b6c4-ce40-4dd6-a0c2-f0f65dd91442" providerId="ADAL" clId="{E340F9FE-63CF-5DC1-BB85-0501F5A6B451}" dt="2026-03-05T14:01:46.447" v="8" actId="478"/>
-          <ac:spMkLst>
-            <pc:docMk/>
-            <pc:sldMk cId="3643261532" sldId="330"/>
-            <ac:spMk id="7" creationId="{9A664D8B-7FAE-4791-338E-6639DB080D7B}"/>
-          </ac:spMkLst>
-        </pc:spChg>
-        <pc:spChg chg="add del">
-          <ac:chgData name="Finley Griffin" userId="22b0b6c4-ce40-4dd6-a0c2-f0f65dd91442" providerId="ADAL" clId="{E340F9FE-63CF-5DC1-BB85-0501F5A6B451}" dt="2026-03-05T14:02:51.059" v="22" actId="478"/>
-          <ac:spMkLst>
-            <pc:docMk/>
-            <pc:sldMk cId="3643261532" sldId="330"/>
-            <ac:spMk id="15" creationId="{0DCF1C6A-F31D-33B3-03D3-BF58286D22E3}"/>
-          </ac:spMkLst>
-        </pc:spChg>
         <pc:spChg chg="add mod">
           <ac:chgData name="Finley Griffin" userId="22b0b6c4-ce40-4dd6-a0c2-f0f65dd91442" providerId="ADAL" clId="{E340F9FE-63CF-5DC1-BB85-0501F5A6B451}" dt="2026-03-05T14:03:41.665" v="99" actId="1076"/>
           <ac:spMkLst>
             <pc:docMk/>
             <pc:sldMk cId="3643261532" sldId="330"/>
             <ac:spMk id="16" creationId="{17A7A6F4-47D8-056F-F007-1FC8850133EB}"/>
-          </ac:spMkLst>
-        </pc:spChg>
-        <pc:spChg chg="add del mod">
-          <ac:chgData name="Finley Griffin" userId="22b0b6c4-ce40-4dd6-a0c2-f0f65dd91442" providerId="ADAL" clId="{E340F9FE-63CF-5DC1-BB85-0501F5A6B451}" dt="2026-03-05T14:03:12.597" v="46" actId="478"/>
-          <ac:spMkLst>
-            <pc:docMk/>
-            <pc:sldMk cId="3643261532" sldId="330"/>
-            <ac:spMk id="17" creationId="{EDB1FB56-EA35-3CFB-9546-56AEDC184309}"/>
           </ac:spMkLst>
         </pc:spChg>
         <pc:spChg chg="add mod">
@@ -270,22 +238,6 @@
             <pc:docMk/>
             <pc:sldMk cId="3643261532" sldId="330"/>
             <ac:spMk id="21" creationId="{31604E53-7CE3-303D-67E5-9D180577F926}"/>
-          </ac:spMkLst>
-        </pc:spChg>
-        <pc:spChg chg="add del mod">
-          <ac:chgData name="Finley Griffin" userId="22b0b6c4-ce40-4dd6-a0c2-f0f65dd91442" providerId="ADAL" clId="{E340F9FE-63CF-5DC1-BB85-0501F5A6B451}" dt="2026-03-05T14:12:17.572" v="403" actId="478"/>
-          <ac:spMkLst>
-            <pc:docMk/>
-            <pc:sldMk cId="3643261532" sldId="330"/>
-            <ac:spMk id="22" creationId="{0FDF1F23-3E94-9922-82A8-1A9876344B4A}"/>
-          </ac:spMkLst>
-        </pc:spChg>
-        <pc:spChg chg="add del mod">
-          <ac:chgData name="Finley Griffin" userId="22b0b6c4-ce40-4dd6-a0c2-f0f65dd91442" providerId="ADAL" clId="{E340F9FE-63CF-5DC1-BB85-0501F5A6B451}" dt="2026-03-05T14:07:06.505" v="195" actId="478"/>
-          <ac:spMkLst>
-            <pc:docMk/>
-            <pc:sldMk cId="3643261532" sldId="330"/>
-            <ac:spMk id="23" creationId="{5B8A20D2-5EA2-C569-A2FD-5E9D2480DB0E}"/>
           </ac:spMkLst>
         </pc:spChg>
         <pc:spChg chg="add mod">
@@ -353,8 +305,8 @@
           </ac:cxnSpMkLst>
         </pc:cxnChg>
       </pc:sldChg>
-      <pc:sldChg chg="addSp delSp modSp new mod">
-        <pc:chgData name="Finley Griffin" userId="22b0b6c4-ce40-4dd6-a0c2-f0f65dd91442" providerId="ADAL" clId="{E340F9FE-63CF-5DC1-BB85-0501F5A6B451}" dt="2026-03-06T10:11:05.088" v="668" actId="20577"/>
+      <pc:sldChg chg="addSp delSp modSp new mod modNotesTx">
+        <pc:chgData name="Finley Griffin" userId="22b0b6c4-ce40-4dd6-a0c2-f0f65dd91442" providerId="ADAL" clId="{E340F9FE-63CF-5DC1-BB85-0501F5A6B451}" dt="2026-03-10T13:41:00.208" v="888" actId="20577"/>
         <pc:sldMkLst>
           <pc:docMk/>
           <pc:sldMk cId="1495705753" sldId="331"/>
@@ -367,28 +319,12 @@
             <ac:spMk id="2" creationId="{23AC0913-7678-7088-0C8A-69CC9CD87457}"/>
           </ac:spMkLst>
         </pc:spChg>
-        <pc:spChg chg="del">
-          <ac:chgData name="Finley Griffin" userId="22b0b6c4-ce40-4dd6-a0c2-f0f65dd91442" providerId="ADAL" clId="{E340F9FE-63CF-5DC1-BB85-0501F5A6B451}" dt="2026-03-06T10:03:04.277" v="544" actId="478"/>
-          <ac:spMkLst>
-            <pc:docMk/>
-            <pc:sldMk cId="1495705753" sldId="331"/>
-            <ac:spMk id="3" creationId="{697E1430-1FFA-D3DD-BB86-25244BA47DD4}"/>
-          </ac:spMkLst>
-        </pc:spChg>
         <pc:spChg chg="add del mod">
-          <ac:chgData name="Finley Griffin" userId="22b0b6c4-ce40-4dd6-a0c2-f0f65dd91442" providerId="ADAL" clId="{E340F9FE-63CF-5DC1-BB85-0501F5A6B451}" dt="2026-03-06T10:11:05.088" v="668" actId="20577"/>
+          <ac:chgData name="Finley Griffin" userId="22b0b6c4-ce40-4dd6-a0c2-f0f65dd91442" providerId="ADAL" clId="{E340F9FE-63CF-5DC1-BB85-0501F5A6B451}" dt="2026-03-10T11:37:50.050" v="674" actId="20577"/>
           <ac:spMkLst>
             <pc:docMk/>
             <pc:sldMk cId="1495705753" sldId="331"/>
             <ac:spMk id="4" creationId="{27D5D536-D61C-6796-C14C-A06789A4FDC3}"/>
-          </ac:spMkLst>
-        </pc:spChg>
-        <pc:spChg chg="add del mod">
-          <ac:chgData name="Finley Griffin" userId="22b0b6c4-ce40-4dd6-a0c2-f0f65dd91442" providerId="ADAL" clId="{E340F9FE-63CF-5DC1-BB85-0501F5A6B451}" dt="2026-03-06T10:05:59.553" v="621" actId="478"/>
-          <ac:spMkLst>
-            <pc:docMk/>
-            <pc:sldMk cId="1495705753" sldId="331"/>
-            <ac:spMk id="6" creationId="{0E0EF31F-3F5B-A453-438A-DED7837B8913}"/>
           </ac:spMkLst>
         </pc:spChg>
         <pc:spChg chg="add mod">
@@ -399,14 +335,6 @@
             <ac:spMk id="8" creationId="{B3FCB599-DA0D-78B2-24A6-83A6F73A120A}"/>
           </ac:spMkLst>
         </pc:spChg>
-        <pc:picChg chg="add del mod">
-          <ac:chgData name="Finley Griffin" userId="22b0b6c4-ce40-4dd6-a0c2-f0f65dd91442" providerId="ADAL" clId="{E340F9FE-63CF-5DC1-BB85-0501F5A6B451}" dt="2026-03-06T10:05:59.553" v="621" actId="478"/>
-          <ac:picMkLst>
-            <pc:docMk/>
-            <pc:sldMk cId="1495705753" sldId="331"/>
-            <ac:picMk id="5" creationId="{5FCEF8CE-840E-E713-F6C3-A74F16634F2F}"/>
-          </ac:picMkLst>
-        </pc:picChg>
         <pc:picChg chg="add mod">
           <ac:chgData name="Finley Griffin" userId="22b0b6c4-ce40-4dd6-a0c2-f0f65dd91442" providerId="ADAL" clId="{E340F9FE-63CF-5DC1-BB85-0501F5A6B451}" dt="2026-03-06T10:10:10.098" v="624" actId="1076"/>
           <ac:picMkLst>
@@ -503,7 +431,7 @@
           <a:p>
             <a:fld id="{C021860F-0246-6943-9513-9B83B6C99F1D}" type="datetimeFigureOut">
               <a:rPr lang="en-US" smtClean="0"/>
-              <a:t>3/6/26</a:t>
+              <a:t>3/10/26</a:t>
             </a:fld>
             <a:endParaRPr lang="en-US"/>
           </a:p>
@@ -950,6 +878,121 @@
 </p:notes>
 </file>
 
+<file path=ppt/notesSlides/notesSlide11.xml><?xml version="1.0" encoding="utf-8"?>
+<p:notes xmlns:a="http://schemas.openxmlformats.org/drawingml/2006/main" xmlns:r="http://schemas.openxmlformats.org/officeDocument/2006/relationships" xmlns:p="http://schemas.openxmlformats.org/presentationml/2006/main">
+  <p:cSld>
+    <p:spTree>
+      <p:nvGrpSpPr>
+        <p:cNvPr id="1" name=""/>
+        <p:cNvGrpSpPr/>
+        <p:nvPr/>
+      </p:nvGrpSpPr>
+      <p:grpSpPr>
+        <a:xfrm>
+          <a:off x="0" y="0"/>
+          <a:ext cx="0" cy="0"/>
+          <a:chOff x="0" y="0"/>
+          <a:chExt cx="0" cy="0"/>
+        </a:xfrm>
+      </p:grpSpPr>
+      <p:sp>
+        <p:nvSpPr>
+          <p:cNvPr id="2" name="Slide Image Placeholder 1"/>
+          <p:cNvSpPr>
+            <a:spLocks noGrp="1" noRot="1" noChangeAspect="1"/>
+          </p:cNvSpPr>
+          <p:nvPr>
+            <p:ph type="sldImg"/>
+          </p:nvPr>
+        </p:nvSpPr>
+        <p:spPr/>
+      </p:sp>
+      <p:sp>
+        <p:nvSpPr>
+          <p:cNvPr id="3" name="Notes Placeholder 2"/>
+          <p:cNvSpPr>
+            <a:spLocks noGrp="1"/>
+          </p:cNvSpPr>
+          <p:nvPr>
+            <p:ph type="body" idx="1"/>
+          </p:nvPr>
+        </p:nvSpPr>
+        <p:spPr/>
+        <p:txBody>
+          <a:bodyPr/>
+          <a:lstStyle/>
+          <a:p>
+            <a:r>
+              <a:rPr lang="en-US" dirty="0"/>
+              <a:t>Walk through notebook, don’t run any cells!</a:t>
+            </a:r>
+          </a:p>
+          <a:p>
+            <a:endParaRPr lang="en-US" dirty="0"/>
+          </a:p>
+          <a:p>
+            <a:r>
+              <a:rPr lang="en-US" dirty="0"/>
+              <a:t>Walk through structure of day after break, where to follow how I’m going to be coding .</a:t>
+            </a:r>
+            <a:r>
+              <a:rPr lang="en-US" dirty="0" err="1"/>
+              <a:t>etc</a:t>
+            </a:r>
+            <a:endParaRPr lang="en-US" dirty="0"/>
+          </a:p>
+          <a:p>
+            <a:endParaRPr lang="en-US" dirty="0"/>
+          </a:p>
+          <a:p>
+            <a:r>
+              <a:rPr lang="en-US" dirty="0"/>
+              <a:t>Walk through first section </a:t>
+            </a:r>
+            <a:r>
+              <a:rPr lang="en-US"/>
+              <a:t>with GitHub</a:t>
+            </a:r>
+            <a:endParaRPr lang="en-US" dirty="0"/>
+          </a:p>
+        </p:txBody>
+      </p:sp>
+      <p:sp>
+        <p:nvSpPr>
+          <p:cNvPr id="4" name="Slide Number Placeholder 3"/>
+          <p:cNvSpPr>
+            <a:spLocks noGrp="1"/>
+          </p:cNvSpPr>
+          <p:nvPr>
+            <p:ph type="sldNum" sz="quarter" idx="5"/>
+          </p:nvPr>
+        </p:nvSpPr>
+        <p:spPr/>
+        <p:txBody>
+          <a:bodyPr/>
+          <a:lstStyle/>
+          <a:p>
+            <a:fld id="{9B2D236A-9B84-094E-B29D-B15C4B2091A2}" type="slidenum">
+              <a:rPr lang="en-US" smtClean="0"/>
+              <a:t>13</a:t>
+            </a:fld>
+            <a:endParaRPr lang="en-US"/>
+          </a:p>
+        </p:txBody>
+      </p:sp>
+    </p:spTree>
+    <p:extLst>
+      <p:ext uri="{BB962C8B-B14F-4D97-AF65-F5344CB8AC3E}">
+        <p14:creationId xmlns:p14="http://schemas.microsoft.com/office/powerpoint/2010/main" val="2143481960"/>
+      </p:ext>
+    </p:extLst>
+  </p:cSld>
+  <p:clrMapOvr>
+    <a:masterClrMapping/>
+  </p:clrMapOvr>
+</p:notes>
+</file>
+
 <file path=ppt/notesSlides/notesSlide2.xml><?xml version="1.0" encoding="utf-8"?>
 <p:notes xmlns:a="http://schemas.openxmlformats.org/drawingml/2006/main" xmlns:r="http://schemas.openxmlformats.org/officeDocument/2006/relationships" xmlns:p="http://schemas.openxmlformats.org/presentationml/2006/main">
   <p:cSld>
@@ -1894,7 +1937,7 @@
           <a:p>
             <a:fld id="{E0E47B38-4403-474D-B901-AA01AFFF0327}" type="datetimeFigureOut">
               <a:rPr lang="en-US" smtClean="0"/>
-              <a:t>3/6/26</a:t>
+              <a:t>3/10/26</a:t>
             </a:fld>
             <a:endParaRPr lang="en-US"/>
           </a:p>
@@ -2094,7 +2137,7 @@
           <a:p>
             <a:fld id="{E0E47B38-4403-474D-B901-AA01AFFF0327}" type="datetimeFigureOut">
               <a:rPr lang="en-US" smtClean="0"/>
-              <a:t>3/6/26</a:t>
+              <a:t>3/10/26</a:t>
             </a:fld>
             <a:endParaRPr lang="en-US"/>
           </a:p>
@@ -2304,7 +2347,7 @@
           <a:p>
             <a:fld id="{E0E47B38-4403-474D-B901-AA01AFFF0327}" type="datetimeFigureOut">
               <a:rPr lang="en-US" smtClean="0"/>
-              <a:t>3/6/26</a:t>
+              <a:t>3/10/26</a:t>
             </a:fld>
             <a:endParaRPr lang="en-US"/>
           </a:p>
@@ -3227,7 +3270,7 @@
           <a:p>
             <a:fld id="{E0E47B38-4403-474D-B901-AA01AFFF0327}" type="datetimeFigureOut">
               <a:rPr lang="en-US" smtClean="0"/>
-              <a:t>3/6/26</a:t>
+              <a:t>3/10/26</a:t>
             </a:fld>
             <a:endParaRPr lang="en-US"/>
           </a:p>
@@ -3503,7 +3546,7 @@
           <a:p>
             <a:fld id="{E0E47B38-4403-474D-B901-AA01AFFF0327}" type="datetimeFigureOut">
               <a:rPr lang="en-US" smtClean="0"/>
-              <a:t>3/6/26</a:t>
+              <a:t>3/10/26</a:t>
             </a:fld>
             <a:endParaRPr lang="en-US"/>
           </a:p>
@@ -3771,7 +3814,7 @@
           <a:p>
             <a:fld id="{E0E47B38-4403-474D-B901-AA01AFFF0327}" type="datetimeFigureOut">
               <a:rPr lang="en-US" smtClean="0"/>
-              <a:t>3/6/26</a:t>
+              <a:t>3/10/26</a:t>
             </a:fld>
             <a:endParaRPr lang="en-US"/>
           </a:p>
@@ -4186,7 +4229,7 @@
           <a:p>
             <a:fld id="{E0E47B38-4403-474D-B901-AA01AFFF0327}" type="datetimeFigureOut">
               <a:rPr lang="en-US" smtClean="0"/>
-              <a:t>3/6/26</a:t>
+              <a:t>3/10/26</a:t>
             </a:fld>
             <a:endParaRPr lang="en-US"/>
           </a:p>
@@ -4328,7 +4371,7 @@
           <a:p>
             <a:fld id="{E0E47B38-4403-474D-B901-AA01AFFF0327}" type="datetimeFigureOut">
               <a:rPr lang="en-US" smtClean="0"/>
-              <a:t>3/6/26</a:t>
+              <a:t>3/10/26</a:t>
             </a:fld>
             <a:endParaRPr lang="en-US"/>
           </a:p>
@@ -4441,7 +4484,7 @@
           <a:p>
             <a:fld id="{E0E47B38-4403-474D-B901-AA01AFFF0327}" type="datetimeFigureOut">
               <a:rPr lang="en-US" smtClean="0"/>
-              <a:t>3/6/26</a:t>
+              <a:t>3/10/26</a:t>
             </a:fld>
             <a:endParaRPr lang="en-US"/>
           </a:p>
@@ -4754,7 +4797,7 @@
           <a:p>
             <a:fld id="{E0E47B38-4403-474D-B901-AA01AFFF0327}" type="datetimeFigureOut">
               <a:rPr lang="en-US" smtClean="0"/>
-              <a:t>3/6/26</a:t>
+              <a:t>3/10/26</a:t>
             </a:fld>
             <a:endParaRPr lang="en-US"/>
           </a:p>
@@ -5043,7 +5086,7 @@
           <a:p>
             <a:fld id="{E0E47B38-4403-474D-B901-AA01AFFF0327}" type="datetimeFigureOut">
               <a:rPr lang="en-US" smtClean="0"/>
-              <a:t>3/6/26</a:t>
+              <a:t>3/10/26</a:t>
             </a:fld>
             <a:endParaRPr lang="en-US"/>
           </a:p>
@@ -5286,7 +5329,7 @@
           <a:p>
             <a:fld id="{E0E47B38-4403-474D-B901-AA01AFFF0327}" type="datetimeFigureOut">
               <a:rPr lang="en-US" smtClean="0"/>
-              <a:t>3/6/26</a:t>
+              <a:t>3/10/26</a:t>
             </a:fld>
             <a:endParaRPr lang="en-US"/>
           </a:p>
@@ -9130,34 +9173,6 @@
             </a:pPr>
             <a:endParaRPr lang="en-US" sz="1870" dirty="0"/>
           </a:p>
-          <a:p>
-            <a:pPr marL="0" indent="0">
-              <a:buNone/>
-            </a:pPr>
-            <a:endParaRPr lang="en-US" sz="1870" dirty="0"/>
-          </a:p>
-          <a:p>
-            <a:r>
-              <a:rPr lang="en-US" sz="1870" dirty="0"/>
-              <a:t>When running a notebook, you will be prompted to select a python interpreter. Navigate to Python Environments and select the </a:t>
-            </a:r>
-            <a:r>
-              <a:rPr lang="en-US" sz="1870" i="1" dirty="0"/>
-              <a:t>.</a:t>
-            </a:r>
-            <a:r>
-              <a:rPr lang="en-US" sz="1870" i="1" dirty="0" err="1"/>
-              <a:t>venv</a:t>
-            </a:r>
-            <a:r>
-              <a:rPr lang="en-US" sz="1870" i="1" dirty="0"/>
-              <a:t>/ </a:t>
-            </a:r>
-            <a:r>
-              <a:rPr lang="en-US" sz="1870" dirty="0"/>
-              <a:t>directory</a:t>
-            </a:r>
-          </a:p>
         </p:txBody>
       </p:sp>
       <p:pic>
@@ -9175,7 +9190,7 @@
           <p:nvPr/>
         </p:nvPicPr>
         <p:blipFill>
-          <a:blip r:embed="rId2"/>
+          <a:blip r:embed="rId3"/>
           <a:stretch>
             <a:fillRect/>
           </a:stretch>
